--- a/docs/2026-2/cea055-estatistica-probabilidade/06-probabilidade-total-bayes/arquivos/Aula_06_Probabilidade_Total_Bayes_SITE.pptx
+++ b/docs/2026-2/cea055-estatistica-probabilidade/06-probabilidade-total-bayes/arquivos/Aula_06_Probabilidade_Total_Bayes_SITE.pptx
@@ -239,7 +239,7 @@
           <a:p>
             <a:fld id="{44623A65-BD25-40B6-8815-498297225DF7}" type="datetimeFigureOut">
               <a:rPr lang="pt-BR" smtClean="0"/>
-              <a:t>14/09/2026</a:t>
+              <a:t>22/10/2026</a:t>
             </a:fld>
             <a:endParaRPr lang="pt-BR" dirty="0"/>
           </a:p>
@@ -653,7 +653,7 @@
           <a:p>
             <a:fld id="{5B45E566-B383-4B2D-B951-1136FD38326E}" type="datetimeFigureOut">
               <a:rPr lang="pt-BR" smtClean="0"/>
-              <a:t>14/09/2026</a:t>
+              <a:t>22/10/2026</a:t>
             </a:fld>
             <a:endParaRPr lang="pt-BR" dirty="0"/>
           </a:p>
@@ -851,7 +851,7 @@
           <a:p>
             <a:fld id="{5B45E566-B383-4B2D-B951-1136FD38326E}" type="datetimeFigureOut">
               <a:rPr lang="pt-BR" smtClean="0"/>
-              <a:t>14/09/2026</a:t>
+              <a:t>22/10/2026</a:t>
             </a:fld>
             <a:endParaRPr lang="pt-BR" dirty="0"/>
           </a:p>
@@ -1059,7 +1059,7 @@
           <a:p>
             <a:fld id="{5B45E566-B383-4B2D-B951-1136FD38326E}" type="datetimeFigureOut">
               <a:rPr lang="pt-BR" smtClean="0"/>
-              <a:t>14/09/2026</a:t>
+              <a:t>22/10/2026</a:t>
             </a:fld>
             <a:endParaRPr lang="pt-BR" dirty="0"/>
           </a:p>
@@ -1257,7 +1257,7 @@
           <a:p>
             <a:fld id="{5B45E566-B383-4B2D-B951-1136FD38326E}" type="datetimeFigureOut">
               <a:rPr lang="pt-BR" smtClean="0"/>
-              <a:t>14/09/2026</a:t>
+              <a:t>22/10/2026</a:t>
             </a:fld>
             <a:endParaRPr lang="pt-BR" dirty="0"/>
           </a:p>
@@ -1532,7 +1532,7 @@
           <a:p>
             <a:fld id="{5B45E566-B383-4B2D-B951-1136FD38326E}" type="datetimeFigureOut">
               <a:rPr lang="pt-BR" smtClean="0"/>
-              <a:t>14/09/2026</a:t>
+              <a:t>22/10/2026</a:t>
             </a:fld>
             <a:endParaRPr lang="pt-BR" dirty="0"/>
           </a:p>
@@ -1797,7 +1797,7 @@
           <a:p>
             <a:fld id="{5B45E566-B383-4B2D-B951-1136FD38326E}" type="datetimeFigureOut">
               <a:rPr lang="pt-BR" smtClean="0"/>
-              <a:t>14/09/2026</a:t>
+              <a:t>22/10/2026</a:t>
             </a:fld>
             <a:endParaRPr lang="pt-BR" dirty="0"/>
           </a:p>
@@ -2209,7 +2209,7 @@
           <a:p>
             <a:fld id="{5B45E566-B383-4B2D-B951-1136FD38326E}" type="datetimeFigureOut">
               <a:rPr lang="pt-BR" smtClean="0"/>
-              <a:t>14/09/2026</a:t>
+              <a:t>22/10/2026</a:t>
             </a:fld>
             <a:endParaRPr lang="pt-BR" dirty="0"/>
           </a:p>
@@ -2350,7 +2350,7 @@
           <a:p>
             <a:fld id="{5B45E566-B383-4B2D-B951-1136FD38326E}" type="datetimeFigureOut">
               <a:rPr lang="pt-BR" smtClean="0"/>
-              <a:t>14/09/2026</a:t>
+              <a:t>22/10/2026</a:t>
             </a:fld>
             <a:endParaRPr lang="pt-BR" dirty="0"/>
           </a:p>
@@ -2463,7 +2463,7 @@
           <a:p>
             <a:fld id="{5B45E566-B383-4B2D-B951-1136FD38326E}" type="datetimeFigureOut">
               <a:rPr lang="pt-BR" smtClean="0"/>
-              <a:t>14/09/2026</a:t>
+              <a:t>22/10/2026</a:t>
             </a:fld>
             <a:endParaRPr lang="pt-BR" dirty="0"/>
           </a:p>
@@ -2774,7 +2774,7 @@
           <a:p>
             <a:fld id="{5B45E566-B383-4B2D-B951-1136FD38326E}" type="datetimeFigureOut">
               <a:rPr lang="pt-BR" smtClean="0"/>
-              <a:t>14/09/2026</a:t>
+              <a:t>22/10/2026</a:t>
             </a:fld>
             <a:endParaRPr lang="pt-BR" dirty="0"/>
           </a:p>
@@ -3062,7 +3062,7 @@
           <a:p>
             <a:fld id="{5B45E566-B383-4B2D-B951-1136FD38326E}" type="datetimeFigureOut">
               <a:rPr lang="pt-BR" smtClean="0"/>
-              <a:t>14/09/2026</a:t>
+              <a:t>22/10/2026</a:t>
             </a:fld>
             <a:endParaRPr lang="pt-BR" dirty="0"/>
           </a:p>
@@ -3327,7 +3327,7 @@
           <a:p>
             <a:fld id="{5B45E566-B383-4B2D-B951-1136FD38326E}" type="datetimeFigureOut">
               <a:rPr lang="pt-BR" smtClean="0"/>
-              <a:t>14/09/2026</a:t>
+              <a:t>22/10/2026</a:t>
             </a:fld>
             <a:endParaRPr lang="pt-BR" dirty="0"/>
           </a:p>
@@ -4040,219 +4040,6 @@
 </file>
 
 <file path=ppt/slides/slide10.xml><?xml version="1.0" encoding="utf-8"?>
-<p:sld xmlns:a="http://schemas.openxmlformats.org/drawingml/2006/main" xmlns:p="http://schemas.openxmlformats.org/presentationml/2006/main" xmlns:r="http://schemas.openxmlformats.org/officeDocument/2006/relationships">
-  <p:cSld>
-    <p:bg>
-      <p:bgPr>
-        <a:solidFill>
-          <a:srgbClr val="E6CCCC"/>
-        </a:solidFill>
-        <a:effectLst/>
-      </p:bgPr>
-    </p:bg>
-    <p:spTree>
-      <p:nvGrpSpPr>
-        <p:cNvPr id="1" name=""/>
-        <p:cNvGrpSpPr/>
-        <p:nvPr/>
-      </p:nvGrpSpPr>
-      <p:grpSpPr/>
-      <p:sp>
-        <p:nvSpPr>
-          <p:cNvPr id="2" name="Oval 1"/>
-          <p:cNvSpPr/>
-          <p:nvPr/>
-        </p:nvSpPr>
-        <p:spPr>
-          <a:xfrm>
-            <a:off x="5775960" y="457200"/>
-            <a:ext cx="640080" cy="640080"/>
-          </a:xfrm>
-          <a:prstGeom prst="ellipse">
-            <a:avLst/>
-          </a:prstGeom>
-          <a:solidFill>
-            <a:srgbClr val="8A3B3F"/>
-          </a:solidFill>
-          <a:ln>
-            <a:noFill/>
-          </a:ln>
-        </p:spPr>
-        <p:style>
-          <a:lnRef idx="1">
-            <a:schemeClr val="accent1"/>
-          </a:lnRef>
-          <a:fillRef idx="3">
-            <a:schemeClr val="accent1"/>
-          </a:fillRef>
-          <a:effectRef idx="2">
-            <a:schemeClr val="accent1"/>
-          </a:effectRef>
-          <a:fontRef idx="minor">
-            <a:schemeClr val="lt1"/>
-          </a:fontRef>
-        </p:style>
-        <p:txBody>
-          <a:bodyPr rtlCol="0" anchor="ctr" wrap="none"/>
-          <a:lstStyle/>
-          <a:p>
-            <a:pPr algn="ctr"/>
-            <a:r>
-              <a:rPr sz="2800" b="1">
-                <a:solidFill>
-                  <a:srgbClr val="FFFFFF"/>
-                </a:solidFill>
-              </a:rPr>
-              <a:t>!</a:t>
-            </a:r>
-          </a:p>
-        </p:txBody>
-      </p:sp>
-      <p:sp>
-        <p:nvSpPr>
-          <p:cNvPr id="3" name="TextBox 2"/>
-          <p:cNvSpPr txBox="1"/>
-          <p:nvPr/>
-        </p:nvSpPr>
-        <p:spPr>
-          <a:xfrm>
-            <a:off x="914400" y="1371600"/>
-            <a:ext cx="10363200" cy="457200"/>
-          </a:xfrm>
-          <a:prstGeom prst="rect">
-            <a:avLst/>
-          </a:prstGeom>
-          <a:noFill/>
-        </p:spPr>
-        <p:txBody>
-          <a:bodyPr wrap="square">
-            <a:spAutoFit/>
-          </a:bodyPr>
-          <a:lstStyle/>
-          <a:p>
-            <a:pPr algn="ctr"/>
-            <a:r>
-              <a:rPr sz="1800" b="1" i="0">
-                <a:solidFill>
-                  <a:srgbClr val="8A3B3F"/>
-                </a:solidFill>
-              </a:rPr>
-              <a:t>VERIFICAÇÃO RÁPIDA</a:t>
-            </a:r>
-          </a:p>
-        </p:txBody>
-      </p:sp>
-      <p:sp>
-        <p:nvSpPr>
-          <p:cNvPr id="4" name="TextBox 3"/>
-          <p:cNvSpPr txBox="1"/>
-          <p:nvPr/>
-        </p:nvSpPr>
-        <p:spPr>
-          <a:xfrm>
-            <a:off x="1188720" y="2103120"/>
-            <a:ext cx="9814560" cy="1167371"/>
-          </a:xfrm>
-          <a:prstGeom prst="rect">
-            <a:avLst/>
-          </a:prstGeom>
-          <a:noFill/>
-        </p:spPr>
-        <p:txBody>
-          <a:bodyPr wrap="square">
-            <a:spAutoFit/>
-          </a:bodyPr>
-          <a:lstStyle/>
-          <a:p>
-            <a:pPr algn="ctr"/>
-            <a:r>
-              <a:rPr sz="2800" b="1" i="0">
-                <a:solidFill>
-                  <a:srgbClr val="3D1F21"/>
-                </a:solidFill>
-              </a:rPr>
-              <a:t>"Suponha que sabemos P(sabre de luz|é Jedi) = 0,95 — quase todo Jedi anda com um sabre de luz. Que tipo de informação, intuitivamente, o Teorema de Bayes me dá a partir disso?"</a:t>
-            </a:r>
-          </a:p>
-        </p:txBody>
-      </p:sp>
-      <p:sp>
-        <p:nvSpPr>
-          <p:cNvPr id="5" name="TextBox 4"/>
-          <p:cNvSpPr txBox="1"/>
-          <p:nvPr/>
-        </p:nvSpPr>
-        <p:spPr>
-          <a:xfrm>
-            <a:off x="914400" y="5577840"/>
-            <a:ext cx="10363200" cy="457200"/>
-          </a:xfrm>
-          <a:prstGeom prst="rect">
-            <a:avLst/>
-          </a:prstGeom>
-          <a:noFill/>
-        </p:spPr>
-        <p:txBody>
-          <a:bodyPr wrap="square">
-            <a:spAutoFit/>
-          </a:bodyPr>
-          <a:lstStyle/>
-          <a:p>
-            <a:pPr algn="ctr"/>
-            <a:r>
-              <a:rPr sz="1600" b="0" i="1">
-                <a:solidFill>
-                  <a:srgbClr val="8A5C5E"/>
-                </a:solidFill>
-              </a:rPr>
-              <a:t>Sorteie um aluno antes de continuar</a:t>
-            </a:r>
-          </a:p>
-        </p:txBody>
-      </p:sp>
-      <p:sp>
-        <p:nvSpPr>
-          <p:cNvPr id="6" name="TextBox 5"/>
-          <p:cNvSpPr txBox="1"/>
-          <p:nvPr/>
-        </p:nvSpPr>
-        <p:spPr>
-          <a:xfrm>
-            <a:off x="361188" y="6463893"/>
-            <a:ext cx="7772400" cy="308152"/>
-          </a:xfrm>
-          <a:prstGeom prst="rect">
-            <a:avLst/>
-          </a:prstGeom>
-          <a:noFill/>
-        </p:spPr>
-        <p:txBody>
-          <a:bodyPr wrap="none">
-            <a:spAutoFit/>
-          </a:bodyPr>
-          <a:lstStyle/>
-          <a:p>
-            <a:pPr algn="l"/>
-            <a:r>
-              <a:rPr sz="1400" b="0" i="0">
-                <a:solidFill>
-                  <a:srgbClr val="595959"/>
-                </a:solidFill>
-              </a:rPr>
-              <a:t>CEA055 – Estatística e Probabilidade – Prof. Marcos Goulart Lima</a:t>
-            </a:r>
-          </a:p>
-        </p:txBody>
-      </p:sp>
-    </p:spTree>
-  </p:cSld>
-  <p:clrMapOvr>
-    <a:masterClrMapping/>
-  </p:clrMapOvr>
-</p:sld>
-</file>
-
-<file path=ppt/slides/slide11.xml><?xml version="1.0" encoding="utf-8"?>
 <p:sld xmlns:a="http://schemas.openxmlformats.org/drawingml/2006/main" xmlns:r="http://schemas.openxmlformats.org/officeDocument/2006/relationships" xmlns:p="http://schemas.openxmlformats.org/presentationml/2006/main">
   <p:cSld>
     <p:spTree>
@@ -4271,127 +4058,6 @@
       </p:grpSpPr>
       <p:sp>
         <p:nvSpPr>
-          <p:cNvPr id="2" name="Título 1">
-            <a:extLst>
-              <a:ext uri="{FF2B5EF4-FFF2-40B4-BE49-F238E27FC236}">
-                <a16:creationId xmlns:a16="http://schemas.microsoft.com/office/drawing/2014/main" id="{BC798918-7CB4-450A-A042-F0B538CA25DE}"/>
-              </a:ext>
-            </a:extLst>
-          </p:cNvPr>
-          <p:cNvSpPr>
-            <a:spLocks noGrp="1"/>
-          </p:cNvSpPr>
-          <p:nvPr>
-            <p:ph type="title"/>
-          </p:nvPr>
-        </p:nvSpPr>
-        <p:spPr>
-          <a:xfrm>
-            <a:off x="1032611" y="0"/>
-            <a:ext cx="10827959" cy="1574800"/>
-          </a:xfrm>
-        </p:spPr>
-        <p:txBody>
-          <a:bodyPr>
-            <a:normAutofit/>
-          </a:bodyPr>
-          <a:lstStyle/>
-          <a:p>
-            <a:pPr algn="ctr"/>
-            <a:r>
-              <a:rPr lang="pt-BR" dirty="0">
-                <a:latin typeface="AlternateGothic2 BT" panose="020B0608020202050204" pitchFamily="34" charset="0"/>
-              </a:rPr>
-              <a:t>CEA055 – Estatística e Probabilidade</a:t>
-            </a:r>
-            <a:br>
-              <a:rPr lang="pt-BR" dirty="0">
-                <a:latin typeface="AlternateGothic2 BT" panose="020B0608020202050204" pitchFamily="34" charset="0"/>
-              </a:rPr>
-            </a:br>
-            <a:r>
-              <a:rPr lang="pt-BR" sz="2200" b="1" dirty="0"/>
-              <a:t>Probabilidade Total e Bayes</a:t>
-            </a:r>
-            <a:endParaRPr lang="pt-BR" dirty="0">
-              <a:latin typeface="AlternateGothic2 BT" panose="020B0608020202050204" pitchFamily="34" charset="0"/>
-            </a:endParaRPr>
-          </a:p>
-        </p:txBody>
-      </p:sp>
-      <p:sp>
-        <p:nvSpPr>
-          <p:cNvPr id="6" name="CaixaDeTexto 5">
-            <a:extLst>
-              <a:ext uri="{FF2B5EF4-FFF2-40B4-BE49-F238E27FC236}">
-                <a16:creationId xmlns:a16="http://schemas.microsoft.com/office/drawing/2014/main" id="{720B10DA-C761-4DEE-8D86-E170E1C2E981}"/>
-              </a:ext>
-            </a:extLst>
-          </p:cNvPr>
-          <p:cNvSpPr txBox="1"/>
-          <p:nvPr/>
-        </p:nvSpPr>
-        <p:spPr>
-          <a:xfrm>
-            <a:off x="881687" y="1506234"/>
-            <a:ext cx="10748061" cy="3359061"/>
-          </a:xfrm>
-          <a:prstGeom prst="rect">
-            <a:avLst/>
-          </a:prstGeom>
-          <a:noFill/>
-        </p:spPr>
-        <p:txBody>
-          <a:bodyPr wrap="square" rtlCol="0">
-            <a:spAutoFit/>
-          </a:bodyPr>
-          <a:lstStyle/>
-          <a:p>
-            <a:pPr>
-              <a:lnSpc>
-                <a:spcPct val="150000"/>
-              </a:lnSpc>
-            </a:pPr>
-            <a:r>
-              <a:rPr lang="pt-BR" sz="2400" b="1" dirty="0"/>
-              <a:t>Exemplo 5.15. </a:t>
-            </a:r>
-            <a:r>
-              <a:rPr lang="pt-BR" sz="2400" dirty="0"/>
-              <a:t>(Bussab &amp; </a:t>
-            </a:r>
-            <a:r>
-              <a:rPr lang="pt-BR" sz="2400" dirty="0" err="1"/>
-              <a:t>Morettin</a:t>
-            </a:r>
-            <a:r>
-              <a:rPr lang="pt-BR" sz="2400" dirty="0"/>
-              <a:t>) Numa empresa, candidatos fazem um curso de treinamento e são classificados como Bons (25%), Médios (50%) ou Fracos (25%). Um teste alternativo, aplicado antes do curso, tem taxa de aprovação de 80% para quem seria Bom, 50% para Médio e 20% para Fraco. </a:t>
-            </a:r>
-          </a:p>
-          <a:p>
-            <a:pPr>
-              <a:lnSpc>
-                <a:spcPct val="150000"/>
-              </a:lnSpc>
-            </a:pPr>
-            <a:endParaRPr lang="pt-BR" sz="2400" dirty="0"/>
-          </a:p>
-          <a:p>
-            <a:pPr>
-              <a:lnSpc>
-                <a:spcPct val="150000"/>
-              </a:lnSpc>
-            </a:pPr>
-            <a:r>
-              <a:rPr lang="pt-BR" sz="2400" dirty="0"/>
-              <a:t>Qual a probabilidade de um candidato aprovado no teste ser, na verdade, Fraco?</a:t>
-            </a:r>
-          </a:p>
-        </p:txBody>
-      </p:sp>
-      <p:sp>
-        <p:nvSpPr>
           <p:cNvPr id="3" name="CaixaDeTexto 2">
             <a:extLst>
               <a:ext uri="{FF2B5EF4-FFF2-40B4-BE49-F238E27FC236}">
@@ -4405,7 +4071,7 @@
         <p:spPr>
           <a:xfrm>
             <a:off x="361395" y="6488668"/>
-            <a:ext cx="2395336" cy="300210"/>
+            <a:ext cx="7620000" cy="300210"/>
           </a:xfrm>
           <a:prstGeom prst="rect">
             <a:avLst/>
@@ -4420,198 +4086,11 @@
           <a:p>
             <a:r>
               <a:rPr lang="pt-BR" sz="1351" dirty="0"/>
-              <a:t>Professor: Marcos Goulart Lima</a:t>
+              <a:t>CEA055 - Estatística e Probabilidade - Professor: Marcos Goulart Lima</a:t>
             </a:r>
           </a:p>
         </p:txBody>
       </p:sp>
-      <p:pic>
-        <p:nvPicPr>
-          <p:cNvPr id="8" name="Espaço Reservado para Conteúdo 4">
-            <a:extLst>
-              <a:ext uri="{FF2B5EF4-FFF2-40B4-BE49-F238E27FC236}">
-                <a16:creationId xmlns:a16="http://schemas.microsoft.com/office/drawing/2014/main" id="{65AB402D-D1A8-4F31-BA42-34A6F0FC69F9}"/>
-              </a:ext>
-            </a:extLst>
-          </p:cNvPr>
-          <p:cNvPicPr>
-            <a:picLocks noChangeAspect="1"/>
-          </p:cNvPicPr>
-          <p:nvPr/>
-        </p:nvPicPr>
-        <p:blipFill>
-          <a:blip r:embed="rId2">
-            <a:extLst>
-              <a:ext uri="{28A0092B-C50C-407E-A947-70E740481C1C}">
-                <a14:useLocalDpi xmlns:a14="http://schemas.microsoft.com/office/drawing/2010/main" val="0"/>
-              </a:ext>
-            </a:extLst>
-          </a:blip>
-          <a:stretch>
-            <a:fillRect/>
-          </a:stretch>
-        </p:blipFill>
-        <p:spPr>
-          <a:xfrm>
-            <a:off x="62144" y="112237"/>
-            <a:ext cx="588096" cy="1228523"/>
-          </a:xfrm>
-          <a:prstGeom prst="rect">
-            <a:avLst/>
-          </a:prstGeom>
-        </p:spPr>
-      </p:pic>
-    </p:spTree>
-    <p:extLst>
-      <p:ext uri="{BB962C8B-B14F-4D97-AF65-F5344CB8AC3E}">
-        <p14:creationId xmlns:p14="http://schemas.microsoft.com/office/powerpoint/2010/main" val="3958118887"/>
-      </p:ext>
-    </p:extLst>
-  </p:cSld>
-  <p:clrMapOvr>
-    <a:masterClrMapping/>
-  </p:clrMapOvr>
-</p:sld>
-</file>
-
-<file path=ppt/slides/slide12.xml><?xml version="1.0" encoding="utf-8"?>
-<p:sld xmlns:a="http://schemas.openxmlformats.org/drawingml/2006/main" xmlns:r="http://schemas.openxmlformats.org/officeDocument/2006/relationships" xmlns:p="http://schemas.openxmlformats.org/presentationml/2006/main">
-  <p:cSld>
-    <p:spTree>
-      <p:nvGrpSpPr>
-        <p:cNvPr id="1" name=""/>
-        <p:cNvGrpSpPr/>
-        <p:nvPr/>
-      </p:nvGrpSpPr>
-      <p:grpSpPr>
-        <a:xfrm>
-          <a:off x="0" y="0"/>
-          <a:ext cx="0" cy="0"/>
-          <a:chOff x="0" y="0"/>
-          <a:chExt cx="0" cy="0"/>
-        </a:xfrm>
-      </p:grpSpPr>
-      <p:sp>
-        <p:nvSpPr>
-          <p:cNvPr id="2" name="Título 1">
-            <a:extLst>
-              <a:ext uri="{FF2B5EF4-FFF2-40B4-BE49-F238E27FC236}">
-                <a16:creationId xmlns:a16="http://schemas.microsoft.com/office/drawing/2014/main" id="{BC798918-7CB4-450A-A042-F0B538CA25DE}"/>
-              </a:ext>
-            </a:extLst>
-          </p:cNvPr>
-          <p:cNvSpPr>
-            <a:spLocks noGrp="1"/>
-          </p:cNvSpPr>
-          <p:nvPr>
-            <p:ph type="title"/>
-          </p:nvPr>
-        </p:nvSpPr>
-        <p:spPr>
-          <a:xfrm>
-            <a:off x="1032611" y="0"/>
-            <a:ext cx="10827959" cy="1574800"/>
-          </a:xfrm>
-        </p:spPr>
-        <p:txBody>
-          <a:bodyPr>
-            <a:normAutofit/>
-          </a:bodyPr>
-          <a:lstStyle/>
-          <a:p>
-            <a:pPr algn="ctr"/>
-            <a:r>
-              <a:rPr lang="pt-BR" dirty="0">
-                <a:latin typeface="AlternateGothic2 BT" panose="020B0608020202050204" pitchFamily="34" charset="0"/>
-              </a:rPr>
-              <a:t>CEA055 – Estatística e Probabilidade</a:t>
-            </a:r>
-            <a:br>
-              <a:rPr lang="pt-BR" dirty="0">
-                <a:latin typeface="AlternateGothic2 BT" panose="020B0608020202050204" pitchFamily="34" charset="0"/>
-              </a:rPr>
-            </a:br>
-            <a:r>
-              <a:rPr lang="pt-BR" sz="2200" b="1" dirty="0"/>
-              <a:t>Probabilidade Total e Bayes</a:t>
-            </a:r>
-            <a:endParaRPr lang="pt-BR" dirty="0">
-              <a:latin typeface="AlternateGothic2 BT" panose="020B0608020202050204" pitchFamily="34" charset="0"/>
-            </a:endParaRPr>
-          </a:p>
-        </p:txBody>
-      </p:sp>
-      <p:sp>
-        <p:nvSpPr>
-          <p:cNvPr id="3" name="CaixaDeTexto 2">
-            <a:extLst>
-              <a:ext uri="{FF2B5EF4-FFF2-40B4-BE49-F238E27FC236}">
-                <a16:creationId xmlns:a16="http://schemas.microsoft.com/office/drawing/2014/main" id="{19131A04-B5D6-4211-8B49-4615DE5797E9}"/>
-              </a:ext>
-            </a:extLst>
-          </p:cNvPr>
-          <p:cNvSpPr txBox="1"/>
-          <p:nvPr/>
-        </p:nvSpPr>
-        <p:spPr>
-          <a:xfrm>
-            <a:off x="361395" y="6488668"/>
-            <a:ext cx="2395336" cy="300210"/>
-          </a:xfrm>
-          <a:prstGeom prst="rect">
-            <a:avLst/>
-          </a:prstGeom>
-          <a:noFill/>
-        </p:spPr>
-        <p:txBody>
-          <a:bodyPr wrap="none" rtlCol="0">
-            <a:spAutoFit/>
-          </a:bodyPr>
-          <a:lstStyle/>
-          <a:p>
-            <a:r>
-              <a:rPr lang="pt-BR" sz="1351" dirty="0"/>
-              <a:t>Professor: Marcos Goulart Lima</a:t>
-            </a:r>
-          </a:p>
-        </p:txBody>
-      </p:sp>
-      <p:pic>
-        <p:nvPicPr>
-          <p:cNvPr id="8" name="Espaço Reservado para Conteúdo 4">
-            <a:extLst>
-              <a:ext uri="{FF2B5EF4-FFF2-40B4-BE49-F238E27FC236}">
-                <a16:creationId xmlns:a16="http://schemas.microsoft.com/office/drawing/2014/main" id="{65AB402D-D1A8-4F31-BA42-34A6F0FC69F9}"/>
-              </a:ext>
-            </a:extLst>
-          </p:cNvPr>
-          <p:cNvPicPr>
-            <a:picLocks noChangeAspect="1"/>
-          </p:cNvPicPr>
-          <p:nvPr/>
-        </p:nvPicPr>
-        <p:blipFill>
-          <a:blip r:embed="rId2">
-            <a:extLst>
-              <a:ext uri="{28A0092B-C50C-407E-A947-70E740481C1C}">
-                <a14:useLocalDpi xmlns:a14="http://schemas.microsoft.com/office/drawing/2010/main" val="0"/>
-              </a:ext>
-            </a:extLst>
-          </a:blip>
-          <a:stretch>
-            <a:fillRect/>
-          </a:stretch>
-        </p:blipFill>
-        <p:spPr>
-          <a:xfrm>
-            <a:off x="62144" y="112237"/>
-            <a:ext cx="588096" cy="1228523"/>
-          </a:xfrm>
-          <a:prstGeom prst="rect">
-            <a:avLst/>
-          </a:prstGeom>
-        </p:spPr>
-      </p:pic>
       <p:pic>
         <p:nvPicPr>
           <p:cNvPr id="5" name="Imagem 4">
@@ -4627,7 +4106,7 @@
           <p:nvPr/>
         </p:nvPicPr>
         <p:blipFill>
-          <a:blip r:embed="rId3"/>
+          <a:blip r:embed="rId2"/>
           <a:stretch>
             <a:fillRect/>
           </a:stretch>
@@ -4657,7 +4136,7 @@
           <p:nvPr/>
         </p:nvPicPr>
         <p:blipFill>
-          <a:blip r:embed="rId4"/>
+          <a:blip r:embed="rId3"/>
           <a:stretch>
             <a:fillRect/>
           </a:stretch>
@@ -4672,8 +4151,8 @@
           </a:prstGeom>
         </p:spPr>
       </p:pic>
-      <mc:AlternateContent xmlns:mc="http://schemas.openxmlformats.org/markup-compatibility/2006">
-        <mc:Choice xmlns:a14="http://schemas.microsoft.com/office/drawing/2010/main" Requires="a14">
+      <mc:AlternateContent xmlns:mc="http://schemas.openxmlformats.org/markup-compatibility/2006" xmlns:a14="http://schemas.microsoft.com/office/drawing/2010/main">
+        <mc:Choice Requires="a14">
           <p:sp>
             <p:nvSpPr>
               <p:cNvPr id="10" name="CaixaDeTexto 9">
@@ -4861,7 +4340,7 @@
             </p:txBody>
           </p:sp>
         </mc:Choice>
-        <mc:Fallback>
+        <mc:Fallback xmlns="">
           <p:sp>
             <p:nvSpPr>
               <p:cNvPr id="10" name="CaixaDeTexto 9">
@@ -4919,220 +4398,7 @@
 </p:sld>
 </file>
 
-<file path=ppt/slides/slide13.xml><?xml version="1.0" encoding="utf-8"?>
-<p:sld xmlns:a="http://schemas.openxmlformats.org/drawingml/2006/main" xmlns:p="http://schemas.openxmlformats.org/presentationml/2006/main" xmlns:r="http://schemas.openxmlformats.org/officeDocument/2006/relationships">
-  <p:cSld>
-    <p:bg>
-      <p:bgPr>
-        <a:solidFill>
-          <a:srgbClr val="E6CCCC"/>
-        </a:solidFill>
-        <a:effectLst/>
-      </p:bgPr>
-    </p:bg>
-    <p:spTree>
-      <p:nvGrpSpPr>
-        <p:cNvPr id="1" name=""/>
-        <p:cNvGrpSpPr/>
-        <p:nvPr/>
-      </p:nvGrpSpPr>
-      <p:grpSpPr/>
-      <p:sp>
-        <p:nvSpPr>
-          <p:cNvPr id="2" name="Oval 1"/>
-          <p:cNvSpPr/>
-          <p:nvPr/>
-        </p:nvSpPr>
-        <p:spPr>
-          <a:xfrm>
-            <a:off x="5775960" y="457200"/>
-            <a:ext cx="640080" cy="640080"/>
-          </a:xfrm>
-          <a:prstGeom prst="ellipse">
-            <a:avLst/>
-          </a:prstGeom>
-          <a:solidFill>
-            <a:srgbClr val="8A3B3F"/>
-          </a:solidFill>
-          <a:ln>
-            <a:noFill/>
-          </a:ln>
-        </p:spPr>
-        <p:style>
-          <a:lnRef idx="1">
-            <a:schemeClr val="accent1"/>
-          </a:lnRef>
-          <a:fillRef idx="3">
-            <a:schemeClr val="accent1"/>
-          </a:fillRef>
-          <a:effectRef idx="2">
-            <a:schemeClr val="accent1"/>
-          </a:effectRef>
-          <a:fontRef idx="minor">
-            <a:schemeClr val="lt1"/>
-          </a:fontRef>
-        </p:style>
-        <p:txBody>
-          <a:bodyPr rtlCol="0" anchor="ctr" wrap="none"/>
-          <a:lstStyle/>
-          <a:p>
-            <a:pPr algn="ctr"/>
-            <a:r>
-              <a:rPr sz="2800" b="1">
-                <a:solidFill>
-                  <a:srgbClr val="FFFFFF"/>
-                </a:solidFill>
-              </a:rPr>
-              <a:t>!</a:t>
-            </a:r>
-          </a:p>
-        </p:txBody>
-      </p:sp>
-      <p:sp>
-        <p:nvSpPr>
-          <p:cNvPr id="3" name="TextBox 2"/>
-          <p:cNvSpPr txBox="1"/>
-          <p:nvPr/>
-        </p:nvSpPr>
-        <p:spPr>
-          <a:xfrm>
-            <a:off x="914400" y="1371600"/>
-            <a:ext cx="10363200" cy="457200"/>
-          </a:xfrm>
-          <a:prstGeom prst="rect">
-            <a:avLst/>
-          </a:prstGeom>
-          <a:noFill/>
-        </p:spPr>
-        <p:txBody>
-          <a:bodyPr wrap="square">
-            <a:spAutoFit/>
-          </a:bodyPr>
-          <a:lstStyle/>
-          <a:p>
-            <a:pPr algn="ctr"/>
-            <a:r>
-              <a:rPr sz="1800" b="1" i="0">
-                <a:solidFill>
-                  <a:srgbClr val="8A3B3F"/>
-                </a:solidFill>
-              </a:rPr>
-              <a:t>VERIFICAÇÃO RÁPIDA</a:t>
-            </a:r>
-          </a:p>
-        </p:txBody>
-      </p:sp>
-      <p:sp>
-        <p:nvSpPr>
-          <p:cNvPr id="4" name="TextBox 3"/>
-          <p:cNvSpPr txBox="1"/>
-          <p:nvPr/>
-        </p:nvSpPr>
-        <p:spPr>
-          <a:xfrm>
-            <a:off x="1188720" y="2103120"/>
-            <a:ext cx="9814560" cy="1167371"/>
-          </a:xfrm>
-          <a:prstGeom prst="rect">
-            <a:avLst/>
-          </a:prstGeom>
-          <a:noFill/>
-        </p:spPr>
-        <p:txBody>
-          <a:bodyPr wrap="square">
-            <a:spAutoFit/>
-          </a:bodyPr>
-          <a:lstStyle/>
-          <a:p>
-            <a:pPr algn="ctr"/>
-            <a:r>
-              <a:rPr sz="2800" b="1" i="0">
-                <a:solidFill>
-                  <a:srgbClr val="3D1F21"/>
-                </a:solidFill>
-              </a:rPr>
-              <a:t>"Escreva no quadro. Numa simulação da Matrix, 20% das pessoas escolheram a pílula vermelha e 80% escolheram a pílula azul (as duas opções formam a partição). De quem toma a vermelha, 90% passa a enxergar o código da Matrix; de quem toma a azul, só 5% enxerga. Uma pessoa está enxergando o código. Monte o numerador e o denominador da fórmula de Bayes para P(pílula vermelha|enxerga o código)."</a:t>
-            </a:r>
-          </a:p>
-        </p:txBody>
-      </p:sp>
-      <p:sp>
-        <p:nvSpPr>
-          <p:cNvPr id="5" name="TextBox 4"/>
-          <p:cNvSpPr txBox="1"/>
-          <p:nvPr/>
-        </p:nvSpPr>
-        <p:spPr>
-          <a:xfrm>
-            <a:off x="914400" y="5577840"/>
-            <a:ext cx="10363200" cy="457200"/>
-          </a:xfrm>
-          <a:prstGeom prst="rect">
-            <a:avLst/>
-          </a:prstGeom>
-          <a:noFill/>
-        </p:spPr>
-        <p:txBody>
-          <a:bodyPr wrap="square">
-            <a:spAutoFit/>
-          </a:bodyPr>
-          <a:lstStyle/>
-          <a:p>
-            <a:pPr algn="ctr"/>
-            <a:r>
-              <a:rPr sz="2000" b="1" i="0">
-                <a:solidFill>
-                  <a:srgbClr val="3D1F21"/>
-                </a:solidFill>
-              </a:rPr>
-              <a:t>P(Cᵢ|A) = P(Cᵢ)·P(A|Cᵢ) / Σⱼ P(Cⱼ)·P(A|Cⱼ)</a:t>
-            </a:r>
-          </a:p>
-        </p:txBody>
-      </p:sp>
-      <p:sp>
-        <p:nvSpPr>
-          <p:cNvPr id="6" name="TextBox 5"/>
-          <p:cNvSpPr txBox="1"/>
-          <p:nvPr/>
-        </p:nvSpPr>
-        <p:spPr>
-          <a:xfrm>
-            <a:off x="361188" y="6463893"/>
-            <a:ext cx="7772400" cy="308152"/>
-          </a:xfrm>
-          <a:prstGeom prst="rect">
-            <a:avLst/>
-          </a:prstGeom>
-          <a:noFill/>
-        </p:spPr>
-        <p:txBody>
-          <a:bodyPr wrap="none">
-            <a:spAutoFit/>
-          </a:bodyPr>
-          <a:lstStyle/>
-          <a:p>
-            <a:pPr algn="l"/>
-            <a:r>
-              <a:rPr sz="1400" b="0" i="0">
-                <a:solidFill>
-                  <a:srgbClr val="595959"/>
-                </a:solidFill>
-              </a:rPr>
-              <a:t>CEA055 – Estatística e Probabilidade – Prof. Marcos Goulart Lima</a:t>
-            </a:r>
-          </a:p>
-        </p:txBody>
-      </p:sp>
-    </p:spTree>
-  </p:cSld>
-  <p:clrMapOvr>
-    <a:masterClrMapping/>
-  </p:clrMapOvr>
-</p:sld>
-</file>
-
-<file path=ppt/slides/slide14.xml><?xml version="1.0" encoding="utf-8"?>
+<file path=ppt/slides/slide11.xml><?xml version="1.0" encoding="utf-8"?>
 <p:sld xmlns:a="http://schemas.openxmlformats.org/drawingml/2006/main" xmlns:r="http://schemas.openxmlformats.org/officeDocument/2006/relationships" xmlns:p="http://schemas.openxmlformats.org/presentationml/2006/main">
   <p:cSld>
     <p:spTree>
@@ -5149,56 +4415,6 @@
           <a:chExt cx="0" cy="0"/>
         </a:xfrm>
       </p:grpSpPr>
-      <p:sp>
-        <p:nvSpPr>
-          <p:cNvPr id="2" name="Título 1">
-            <a:extLst>
-              <a:ext uri="{FF2B5EF4-FFF2-40B4-BE49-F238E27FC236}">
-                <a16:creationId xmlns:a16="http://schemas.microsoft.com/office/drawing/2014/main" id="{BC798918-7CB4-450A-A042-F0B538CA25DE}"/>
-              </a:ext>
-            </a:extLst>
-          </p:cNvPr>
-          <p:cNvSpPr>
-            <a:spLocks noGrp="1"/>
-          </p:cNvSpPr>
-          <p:nvPr>
-            <p:ph type="title"/>
-          </p:nvPr>
-        </p:nvSpPr>
-        <p:spPr>
-          <a:xfrm>
-            <a:off x="1032611" y="0"/>
-            <a:ext cx="10827959" cy="1574800"/>
-          </a:xfrm>
-        </p:spPr>
-        <p:txBody>
-          <a:bodyPr>
-            <a:normAutofit/>
-          </a:bodyPr>
-          <a:lstStyle/>
-          <a:p>
-            <a:pPr algn="ctr"/>
-            <a:r>
-              <a:rPr lang="pt-BR" dirty="0">
-                <a:latin typeface="AlternateGothic2 BT" panose="020B0608020202050204" pitchFamily="34" charset="0"/>
-              </a:rPr>
-              <a:t>CEA055 – Estatística e Probabilidade</a:t>
-            </a:r>
-            <a:br>
-              <a:rPr lang="pt-BR" dirty="0">
-                <a:latin typeface="AlternateGothic2 BT" panose="020B0608020202050204" pitchFamily="34" charset="0"/>
-              </a:rPr>
-            </a:br>
-            <a:r>
-              <a:rPr lang="pt-BR" sz="2200" b="1" dirty="0"/>
-              <a:t>Probabilidade Total e Bayes</a:t>
-            </a:r>
-            <a:endParaRPr lang="pt-BR" dirty="0">
-              <a:latin typeface="AlternateGothic2 BT" panose="020B0608020202050204" pitchFamily="34" charset="0"/>
-            </a:endParaRPr>
-          </a:p>
-        </p:txBody>
-      </p:sp>
       <p:sp>
         <p:nvSpPr>
           <p:cNvPr id="6" name="CaixaDeTexto 5">
@@ -5249,7 +4465,7 @@
         <p:spPr>
           <a:xfrm>
             <a:off x="361395" y="6488668"/>
-            <a:ext cx="2395336" cy="300210"/>
+            <a:ext cx="7620000" cy="300210"/>
           </a:xfrm>
           <a:prstGeom prst="rect">
             <a:avLst/>
@@ -5264,47 +4480,11 @@
           <a:p>
             <a:r>
               <a:rPr lang="pt-BR" sz="1351" dirty="0"/>
-              <a:t>Professor: Marcos Goulart Lima</a:t>
+              <a:t>CEA055 - Estatística e Probabilidade - Professor: Marcos Goulart Lima</a:t>
             </a:r>
           </a:p>
         </p:txBody>
       </p:sp>
-      <p:pic>
-        <p:nvPicPr>
-          <p:cNvPr id="8" name="Espaço Reservado para Conteúdo 4">
-            <a:extLst>
-              <a:ext uri="{FF2B5EF4-FFF2-40B4-BE49-F238E27FC236}">
-                <a16:creationId xmlns:a16="http://schemas.microsoft.com/office/drawing/2014/main" id="{65AB402D-D1A8-4F31-BA42-34A6F0FC69F9}"/>
-              </a:ext>
-            </a:extLst>
-          </p:cNvPr>
-          <p:cNvPicPr>
-            <a:picLocks noChangeAspect="1"/>
-          </p:cNvPicPr>
-          <p:nvPr/>
-        </p:nvPicPr>
-        <p:blipFill>
-          <a:blip r:embed="rId2">
-            <a:extLst>
-              <a:ext uri="{28A0092B-C50C-407E-A947-70E740481C1C}">
-                <a14:useLocalDpi xmlns:a14="http://schemas.microsoft.com/office/drawing/2010/main" val="0"/>
-              </a:ext>
-            </a:extLst>
-          </a:blip>
-          <a:stretch>
-            <a:fillRect/>
-          </a:stretch>
-        </p:blipFill>
-        <p:spPr>
-          <a:xfrm>
-            <a:off x="62144" y="112237"/>
-            <a:ext cx="588096" cy="1228523"/>
-          </a:xfrm>
-          <a:prstGeom prst="rect">
-            <a:avLst/>
-          </a:prstGeom>
-        </p:spPr>
-      </p:pic>
       <p:pic>
         <p:nvPicPr>
           <p:cNvPr id="9" name="Imagem 8">
@@ -5320,7 +4500,7 @@
           <p:nvPr/>
         </p:nvPicPr>
         <p:blipFill>
-          <a:blip r:embed="rId3"/>
+          <a:blip r:embed="rId2"/>
           <a:stretch>
             <a:fillRect/>
           </a:stretch>
@@ -5392,7 +4572,7 @@
 </p:sld>
 </file>
 
-<file path=ppt/slides/slide15.xml><?xml version="1.0" encoding="utf-8"?>
+<file path=ppt/slides/slide12.xml><?xml version="1.0" encoding="utf-8"?>
 <p:sld xmlns:a="http://schemas.openxmlformats.org/drawingml/2006/main" xmlns:r="http://schemas.openxmlformats.org/officeDocument/2006/relationships" xmlns:p="http://schemas.openxmlformats.org/presentationml/2006/main">
   <p:cSld>
     <p:spTree>
@@ -5409,58 +4589,8 @@
           <a:chExt cx="0" cy="0"/>
         </a:xfrm>
       </p:grpSpPr>
-      <p:sp>
-        <p:nvSpPr>
-          <p:cNvPr id="2" name="Título 1">
-            <a:extLst>
-              <a:ext uri="{FF2B5EF4-FFF2-40B4-BE49-F238E27FC236}">
-                <a16:creationId xmlns:a16="http://schemas.microsoft.com/office/drawing/2014/main" id="{BC798918-7CB4-450A-A042-F0B538CA25DE}"/>
-              </a:ext>
-            </a:extLst>
-          </p:cNvPr>
-          <p:cNvSpPr>
-            <a:spLocks noGrp="1"/>
-          </p:cNvSpPr>
-          <p:nvPr>
-            <p:ph type="title"/>
-          </p:nvPr>
-        </p:nvSpPr>
-        <p:spPr>
-          <a:xfrm>
-            <a:off x="1032611" y="0"/>
-            <a:ext cx="10827959" cy="1574800"/>
-          </a:xfrm>
-        </p:spPr>
-        <p:txBody>
-          <a:bodyPr>
-            <a:normAutofit/>
-          </a:bodyPr>
-          <a:lstStyle/>
-          <a:p>
-            <a:pPr algn="ctr"/>
-            <a:r>
-              <a:rPr lang="pt-BR" dirty="0">
-                <a:latin typeface="AlternateGothic2 BT" panose="020B0608020202050204" pitchFamily="34" charset="0"/>
-              </a:rPr>
-              <a:t>CEA055 – Estatística e Probabilidade</a:t>
-            </a:r>
-            <a:br>
-              <a:rPr lang="pt-BR" dirty="0">
-                <a:latin typeface="AlternateGothic2 BT" panose="020B0608020202050204" pitchFamily="34" charset="0"/>
-              </a:rPr>
-            </a:br>
-            <a:r>
-              <a:rPr lang="pt-BR" sz="2200" b="1" dirty="0"/>
-              <a:t>Probabilidade Total e Bayes</a:t>
-            </a:r>
-            <a:endParaRPr lang="pt-BR" dirty="0">
-              <a:latin typeface="AlternateGothic2 BT" panose="020B0608020202050204" pitchFamily="34" charset="0"/>
-            </a:endParaRPr>
-          </a:p>
-        </p:txBody>
-      </p:sp>
-      <mc:AlternateContent xmlns:mc="http://schemas.openxmlformats.org/markup-compatibility/2006">
-        <mc:Choice xmlns:a14="http://schemas.microsoft.com/office/drawing/2010/main" Requires="a14">
+      <mc:AlternateContent xmlns:mc="http://schemas.openxmlformats.org/markup-compatibility/2006" xmlns:a14="http://schemas.microsoft.com/office/drawing/2010/main">
+        <mc:Choice Requires="a14">
           <p:sp>
             <p:nvSpPr>
               <p:cNvPr id="6" name="CaixaDeTexto 5">
@@ -6628,7 +5758,7 @@
             </p:txBody>
           </p:sp>
         </mc:Choice>
-        <mc:Fallback>
+        <mc:Fallback xmlns="">
           <p:sp>
             <p:nvSpPr>
               <p:cNvPr id="6" name="CaixaDeTexto 5">
@@ -6688,7 +5818,7 @@
         <p:spPr>
           <a:xfrm>
             <a:off x="361395" y="6488668"/>
-            <a:ext cx="2395336" cy="300210"/>
+            <a:ext cx="7620000" cy="300210"/>
           </a:xfrm>
           <a:prstGeom prst="rect">
             <a:avLst/>
@@ -6703,47 +5833,11 @@
           <a:p>
             <a:r>
               <a:rPr lang="pt-BR" sz="1351" dirty="0"/>
-              <a:t>Professor: Marcos Goulart Lima</a:t>
+              <a:t>CEA055 - Estatística e Probabilidade - Professor: Marcos Goulart Lima</a:t>
             </a:r>
           </a:p>
         </p:txBody>
       </p:sp>
-      <p:pic>
-        <p:nvPicPr>
-          <p:cNvPr id="8" name="Espaço Reservado para Conteúdo 4">
-            <a:extLst>
-              <a:ext uri="{FF2B5EF4-FFF2-40B4-BE49-F238E27FC236}">
-                <a16:creationId xmlns:a16="http://schemas.microsoft.com/office/drawing/2014/main" id="{65AB402D-D1A8-4F31-BA42-34A6F0FC69F9}"/>
-              </a:ext>
-            </a:extLst>
-          </p:cNvPr>
-          <p:cNvPicPr>
-            <a:picLocks noChangeAspect="1"/>
-          </p:cNvPicPr>
-          <p:nvPr/>
-        </p:nvPicPr>
-        <p:blipFill>
-          <a:blip r:embed="rId3">
-            <a:extLst>
-              <a:ext uri="{28A0092B-C50C-407E-A947-70E740481C1C}">
-                <a14:useLocalDpi xmlns:a14="http://schemas.microsoft.com/office/drawing/2010/main" val="0"/>
-              </a:ext>
-            </a:extLst>
-          </a:blip>
-          <a:stretch>
-            <a:fillRect/>
-          </a:stretch>
-        </p:blipFill>
-        <p:spPr>
-          <a:xfrm>
-            <a:off x="62144" y="112237"/>
-            <a:ext cx="588096" cy="1228523"/>
-          </a:xfrm>
-          <a:prstGeom prst="rect">
-            <a:avLst/>
-          </a:prstGeom>
-        </p:spPr>
-      </p:pic>
       <p:pic>
         <p:nvPicPr>
           <p:cNvPr id="10" name="Imagem 9">
@@ -6759,7 +5853,7 @@
           <p:nvPr/>
         </p:nvPicPr>
         <p:blipFill>
-          <a:blip r:embed="rId4"/>
+          <a:blip r:embed="rId3"/>
           <a:stretch>
             <a:fillRect/>
           </a:stretch>
@@ -6787,7 +5881,7 @@
 </p:sld>
 </file>
 
-<file path=ppt/slides/slide16.xml><?xml version="1.0" encoding="utf-8"?>
+<file path=ppt/slides/slide13.xml><?xml version="1.0" encoding="utf-8"?>
 <p:sld xmlns:a="http://schemas.openxmlformats.org/drawingml/2006/main" xmlns:r="http://schemas.openxmlformats.org/officeDocument/2006/relationships" xmlns:p="http://schemas.openxmlformats.org/presentationml/2006/main">
   <p:cSld>
     <p:spTree>
@@ -6804,56 +5898,6 @@
           <a:chExt cx="0" cy="0"/>
         </a:xfrm>
       </p:grpSpPr>
-      <p:sp>
-        <p:nvSpPr>
-          <p:cNvPr id="2" name="Título 1">
-            <a:extLst>
-              <a:ext uri="{FF2B5EF4-FFF2-40B4-BE49-F238E27FC236}">
-                <a16:creationId xmlns:a16="http://schemas.microsoft.com/office/drawing/2014/main" id="{BC798918-7CB4-450A-A042-F0B538CA25DE}"/>
-              </a:ext>
-            </a:extLst>
-          </p:cNvPr>
-          <p:cNvSpPr>
-            <a:spLocks noGrp="1"/>
-          </p:cNvSpPr>
-          <p:nvPr>
-            <p:ph type="title"/>
-          </p:nvPr>
-        </p:nvSpPr>
-        <p:spPr>
-          <a:xfrm>
-            <a:off x="1032611" y="0"/>
-            <a:ext cx="10827959" cy="1574800"/>
-          </a:xfrm>
-        </p:spPr>
-        <p:txBody>
-          <a:bodyPr>
-            <a:normAutofit/>
-          </a:bodyPr>
-          <a:lstStyle/>
-          <a:p>
-            <a:pPr algn="ctr"/>
-            <a:r>
-              <a:rPr lang="pt-BR" dirty="0">
-                <a:latin typeface="AlternateGothic2 BT" panose="020B0608020202050204" pitchFamily="34" charset="0"/>
-              </a:rPr>
-              <a:t>CEA055 – Estatística e Probabilidade</a:t>
-            </a:r>
-            <a:br>
-              <a:rPr lang="pt-BR" dirty="0">
-                <a:latin typeface="AlternateGothic2 BT" panose="020B0608020202050204" pitchFamily="34" charset="0"/>
-              </a:rPr>
-            </a:br>
-            <a:r>
-              <a:rPr lang="pt-BR" sz="2200" b="1" dirty="0"/>
-              <a:t>Probabilidade Total e Bayes</a:t>
-            </a:r>
-            <a:endParaRPr lang="pt-BR" dirty="0">
-              <a:latin typeface="AlternateGothic2 BT" panose="020B0608020202050204" pitchFamily="34" charset="0"/>
-            </a:endParaRPr>
-          </a:p>
-        </p:txBody>
-      </p:sp>
       <mc:AlternateContent xmlns:mc="http://schemas.openxmlformats.org/markup-compatibility/2006">
         <mc:Choice xmlns:a14="http://schemas.microsoft.com/office/drawing/2010/main" Requires="a14">
           <p:sp>
@@ -6870,7 +5914,7 @@
             </p:nvSpPr>
             <p:spPr>
               <a:xfrm>
-                <a:off x="881687" y="1506234"/>
+                <a:off x="881687" y="1132887"/>
                 <a:ext cx="10748061" cy="5280613"/>
               </a:xfrm>
               <a:prstGeom prst="rect">
@@ -7600,7 +6644,7 @@
             </p:nvSpPr>
             <p:spPr>
               <a:xfrm>
-                <a:off x="881687" y="1506234"/>
+                <a:off x="881687" y="1132887"/>
                 <a:ext cx="10748061" cy="5280613"/>
               </a:xfrm>
               <a:prstGeom prst="rect">
@@ -7643,7 +6687,7 @@
         <p:spPr>
           <a:xfrm>
             <a:off x="361395" y="6488668"/>
-            <a:ext cx="2395336" cy="300210"/>
+            <a:ext cx="7620000" cy="300210"/>
           </a:xfrm>
           <a:prstGeom prst="rect">
             <a:avLst/>
@@ -7658,47 +6702,11 @@
           <a:p>
             <a:r>
               <a:rPr lang="pt-BR" sz="1351" dirty="0"/>
-              <a:t>Professor: Marcos Goulart Lima</a:t>
+              <a:t>CEA055 - Estatística e Probabilidade - Professor: Marcos Goulart Lima</a:t>
             </a:r>
           </a:p>
         </p:txBody>
       </p:sp>
-      <p:pic>
-        <p:nvPicPr>
-          <p:cNvPr id="8" name="Espaço Reservado para Conteúdo 4">
-            <a:extLst>
-              <a:ext uri="{FF2B5EF4-FFF2-40B4-BE49-F238E27FC236}">
-                <a16:creationId xmlns:a16="http://schemas.microsoft.com/office/drawing/2014/main" id="{65AB402D-D1A8-4F31-BA42-34A6F0FC69F9}"/>
-              </a:ext>
-            </a:extLst>
-          </p:cNvPr>
-          <p:cNvPicPr>
-            <a:picLocks noChangeAspect="1"/>
-          </p:cNvPicPr>
-          <p:nvPr/>
-        </p:nvPicPr>
-        <p:blipFill>
-          <a:blip r:embed="rId3">
-            <a:extLst>
-              <a:ext uri="{28A0092B-C50C-407E-A947-70E740481C1C}">
-                <a14:useLocalDpi xmlns:a14="http://schemas.microsoft.com/office/drawing/2010/main" val="0"/>
-              </a:ext>
-            </a:extLst>
-          </a:blip>
-          <a:stretch>
-            <a:fillRect/>
-          </a:stretch>
-        </p:blipFill>
-        <p:spPr>
-          <a:xfrm>
-            <a:off x="62144" y="112237"/>
-            <a:ext cx="588096" cy="1228523"/>
-          </a:xfrm>
-          <a:prstGeom prst="rect">
-            <a:avLst/>
-          </a:prstGeom>
-        </p:spPr>
-      </p:pic>
     </p:spTree>
     <p:extLst>
       <p:ext uri="{BB962C8B-B14F-4D97-AF65-F5344CB8AC3E}">
@@ -7712,7 +6720,7 @@
 </p:sld>
 </file>
 
-<file path=ppt/slides/slide17.xml><?xml version="1.0" encoding="utf-8"?>
+<file path=ppt/slides/slide14.xml><?xml version="1.0" encoding="utf-8"?>
 <p:sld xmlns:a="http://schemas.openxmlformats.org/drawingml/2006/main" xmlns:r="http://schemas.openxmlformats.org/officeDocument/2006/relationships" xmlns:p="http://schemas.openxmlformats.org/presentationml/2006/main">
   <p:cSld>
     <p:spTree>
@@ -7729,58 +6737,8 @@
           <a:chExt cx="0" cy="0"/>
         </a:xfrm>
       </p:grpSpPr>
-      <p:sp>
-        <p:nvSpPr>
-          <p:cNvPr id="2" name="Título 1">
-            <a:extLst>
-              <a:ext uri="{FF2B5EF4-FFF2-40B4-BE49-F238E27FC236}">
-                <a16:creationId xmlns:a16="http://schemas.microsoft.com/office/drawing/2014/main" id="{BC798918-7CB4-450A-A042-F0B538CA25DE}"/>
-              </a:ext>
-            </a:extLst>
-          </p:cNvPr>
-          <p:cNvSpPr>
-            <a:spLocks noGrp="1"/>
-          </p:cNvSpPr>
-          <p:nvPr>
-            <p:ph type="title"/>
-          </p:nvPr>
-        </p:nvSpPr>
-        <p:spPr>
-          <a:xfrm>
-            <a:off x="1032611" y="0"/>
-            <a:ext cx="10827959" cy="1574800"/>
-          </a:xfrm>
-        </p:spPr>
-        <p:txBody>
-          <a:bodyPr>
-            <a:normAutofit/>
-          </a:bodyPr>
-          <a:lstStyle/>
-          <a:p>
-            <a:pPr algn="ctr"/>
-            <a:r>
-              <a:rPr lang="pt-BR" dirty="0">
-                <a:latin typeface="AlternateGothic2 BT" panose="020B0608020202050204" pitchFamily="34" charset="0"/>
-              </a:rPr>
-              <a:t>CEA055 – Estatística e Probabilidade</a:t>
-            </a:r>
-            <a:br>
-              <a:rPr lang="pt-BR" dirty="0">
-                <a:latin typeface="AlternateGothic2 BT" panose="020B0608020202050204" pitchFamily="34" charset="0"/>
-              </a:rPr>
-            </a:br>
-            <a:r>
-              <a:rPr lang="pt-BR" sz="2200" b="1" dirty="0"/>
-              <a:t>Probabilidade Total e Bayes</a:t>
-            </a:r>
-            <a:endParaRPr lang="pt-BR" dirty="0">
-              <a:latin typeface="AlternateGothic2 BT" panose="020B0608020202050204" pitchFamily="34" charset="0"/>
-            </a:endParaRPr>
-          </a:p>
-        </p:txBody>
-      </p:sp>
-      <mc:AlternateContent xmlns:mc="http://schemas.openxmlformats.org/markup-compatibility/2006">
-        <mc:Choice xmlns:a14="http://schemas.microsoft.com/office/drawing/2010/main" Requires="a14">
+      <mc:AlternateContent xmlns:mc="http://schemas.openxmlformats.org/markup-compatibility/2006" xmlns:a14="http://schemas.microsoft.com/office/drawing/2010/main">
+        <mc:Choice Requires="a14">
           <p:sp>
             <p:nvSpPr>
               <p:cNvPr id="6" name="CaixaDeTexto 5">
@@ -7901,7 +6859,7 @@
             </p:txBody>
           </p:sp>
         </mc:Choice>
-        <mc:Fallback>
+        <mc:Fallback xmlns="">
           <p:sp>
             <p:nvSpPr>
               <p:cNvPr id="6" name="CaixaDeTexto 5">
@@ -7961,7 +6919,7 @@
         <p:spPr>
           <a:xfrm>
             <a:off x="361395" y="6488668"/>
-            <a:ext cx="2395336" cy="300210"/>
+            <a:ext cx="7620000" cy="300210"/>
           </a:xfrm>
           <a:prstGeom prst="rect">
             <a:avLst/>
@@ -7976,47 +6934,11 @@
           <a:p>
             <a:r>
               <a:rPr lang="pt-BR" sz="1351" dirty="0"/>
-              <a:t>Professor: Marcos Goulart Lima</a:t>
+              <a:t>CEA055 - Estatística e Probabilidade - Professor: Marcos Goulart Lima</a:t>
             </a:r>
           </a:p>
         </p:txBody>
       </p:sp>
-      <p:pic>
-        <p:nvPicPr>
-          <p:cNvPr id="8" name="Espaço Reservado para Conteúdo 4">
-            <a:extLst>
-              <a:ext uri="{FF2B5EF4-FFF2-40B4-BE49-F238E27FC236}">
-                <a16:creationId xmlns:a16="http://schemas.microsoft.com/office/drawing/2014/main" id="{65AB402D-D1A8-4F31-BA42-34A6F0FC69F9}"/>
-              </a:ext>
-            </a:extLst>
-          </p:cNvPr>
-          <p:cNvPicPr>
-            <a:picLocks noChangeAspect="1"/>
-          </p:cNvPicPr>
-          <p:nvPr/>
-        </p:nvPicPr>
-        <p:blipFill>
-          <a:blip r:embed="rId3">
-            <a:extLst>
-              <a:ext uri="{28A0092B-C50C-407E-A947-70E740481C1C}">
-                <a14:useLocalDpi xmlns:a14="http://schemas.microsoft.com/office/drawing/2010/main" val="0"/>
-              </a:ext>
-            </a:extLst>
-          </a:blip>
-          <a:stretch>
-            <a:fillRect/>
-          </a:stretch>
-        </p:blipFill>
-        <p:spPr>
-          <a:xfrm>
-            <a:off x="62144" y="112237"/>
-            <a:ext cx="588096" cy="1228523"/>
-          </a:xfrm>
-          <a:prstGeom prst="rect">
-            <a:avLst/>
-          </a:prstGeom>
-        </p:spPr>
-      </p:pic>
     </p:spTree>
     <p:extLst>
       <p:ext uri="{BB962C8B-B14F-4D97-AF65-F5344CB8AC3E}">
@@ -8030,7 +6952,7 @@
 </p:sld>
 </file>
 
-<file path=ppt/slides/slide18.xml><?xml version="1.0" encoding="utf-8"?>
+<file path=ppt/slides/slide15.xml><?xml version="1.0" encoding="utf-8"?>
 <p:sld xmlns:a="http://schemas.openxmlformats.org/drawingml/2006/main" xmlns:r="http://schemas.openxmlformats.org/officeDocument/2006/relationships" xmlns:p="http://schemas.openxmlformats.org/presentationml/2006/main">
   <p:cSld>
     <p:spTree>
@@ -8047,58 +6969,8 @@
           <a:chExt cx="0" cy="0"/>
         </a:xfrm>
       </p:grpSpPr>
-      <p:sp>
-        <p:nvSpPr>
-          <p:cNvPr id="2" name="Título 1">
-            <a:extLst>
-              <a:ext uri="{FF2B5EF4-FFF2-40B4-BE49-F238E27FC236}">
-                <a16:creationId xmlns:a16="http://schemas.microsoft.com/office/drawing/2014/main" id="{BC798918-7CB4-450A-A042-F0B538CA25DE}"/>
-              </a:ext>
-            </a:extLst>
-          </p:cNvPr>
-          <p:cNvSpPr>
-            <a:spLocks noGrp="1"/>
-          </p:cNvSpPr>
-          <p:nvPr>
-            <p:ph type="title"/>
-          </p:nvPr>
-        </p:nvSpPr>
-        <p:spPr>
-          <a:xfrm>
-            <a:off x="1032611" y="0"/>
-            <a:ext cx="10827959" cy="1574800"/>
-          </a:xfrm>
-        </p:spPr>
-        <p:txBody>
-          <a:bodyPr>
-            <a:normAutofit/>
-          </a:bodyPr>
-          <a:lstStyle/>
-          <a:p>
-            <a:pPr algn="ctr"/>
-            <a:r>
-              <a:rPr lang="pt-BR" dirty="0">
-                <a:latin typeface="AlternateGothic2 BT" panose="020B0608020202050204" pitchFamily="34" charset="0"/>
-              </a:rPr>
-              <a:t>CEA055 – Estatística e Probabilidade</a:t>
-            </a:r>
-            <a:br>
-              <a:rPr lang="pt-BR" dirty="0">
-                <a:latin typeface="AlternateGothic2 BT" panose="020B0608020202050204" pitchFamily="34" charset="0"/>
-              </a:rPr>
-            </a:br>
-            <a:r>
-              <a:rPr lang="pt-BR" sz="2200" b="1" dirty="0"/>
-              <a:t>Probabilidade Total e Bayes</a:t>
-            </a:r>
-            <a:endParaRPr lang="pt-BR" dirty="0">
-              <a:latin typeface="AlternateGothic2 BT" panose="020B0608020202050204" pitchFamily="34" charset="0"/>
-            </a:endParaRPr>
-          </a:p>
-        </p:txBody>
-      </p:sp>
-      <mc:AlternateContent xmlns:mc="http://schemas.openxmlformats.org/markup-compatibility/2006">
-        <mc:Choice xmlns:a14="http://schemas.microsoft.com/office/drawing/2010/main" Requires="a14">
+      <mc:AlternateContent xmlns:mc="http://schemas.openxmlformats.org/markup-compatibility/2006" xmlns:a14="http://schemas.microsoft.com/office/drawing/2010/main">
+        <mc:Choice Requires="a14">
           <p:sp>
             <p:nvSpPr>
               <p:cNvPr id="6" name="CaixaDeTexto 5">
@@ -8439,7 +7311,7 @@
             </p:txBody>
           </p:sp>
         </mc:Choice>
-        <mc:Fallback>
+        <mc:Fallback xmlns="">
           <p:sp>
             <p:nvSpPr>
               <p:cNvPr id="6" name="CaixaDeTexto 5">
@@ -8499,7 +7371,7 @@
         <p:spPr>
           <a:xfrm>
             <a:off x="361395" y="6488668"/>
-            <a:ext cx="2395336" cy="300210"/>
+            <a:ext cx="7620000" cy="300210"/>
           </a:xfrm>
           <a:prstGeom prst="rect">
             <a:avLst/>
@@ -8514,47 +7386,11 @@
           <a:p>
             <a:r>
               <a:rPr lang="pt-BR" sz="1351" dirty="0"/>
-              <a:t>Professor: Marcos Goulart Lima</a:t>
+              <a:t>CEA055 - Estatística e Probabilidade - Professor: Marcos Goulart Lima</a:t>
             </a:r>
           </a:p>
         </p:txBody>
       </p:sp>
-      <p:pic>
-        <p:nvPicPr>
-          <p:cNvPr id="8" name="Espaço Reservado para Conteúdo 4">
-            <a:extLst>
-              <a:ext uri="{FF2B5EF4-FFF2-40B4-BE49-F238E27FC236}">
-                <a16:creationId xmlns:a16="http://schemas.microsoft.com/office/drawing/2014/main" id="{65AB402D-D1A8-4F31-BA42-34A6F0FC69F9}"/>
-              </a:ext>
-            </a:extLst>
-          </p:cNvPr>
-          <p:cNvPicPr>
-            <a:picLocks noChangeAspect="1"/>
-          </p:cNvPicPr>
-          <p:nvPr/>
-        </p:nvPicPr>
-        <p:blipFill>
-          <a:blip r:embed="rId3">
-            <a:extLst>
-              <a:ext uri="{28A0092B-C50C-407E-A947-70E740481C1C}">
-                <a14:useLocalDpi xmlns:a14="http://schemas.microsoft.com/office/drawing/2010/main" val="0"/>
-              </a:ext>
-            </a:extLst>
-          </a:blip>
-          <a:stretch>
-            <a:fillRect/>
-          </a:stretch>
-        </p:blipFill>
-        <p:spPr>
-          <a:xfrm>
-            <a:off x="62144" y="112237"/>
-            <a:ext cx="588096" cy="1228523"/>
-          </a:xfrm>
-          <a:prstGeom prst="rect">
-            <a:avLst/>
-          </a:prstGeom>
-        </p:spPr>
-      </p:pic>
     </p:spTree>
     <p:extLst>
       <p:ext uri="{BB962C8B-B14F-4D97-AF65-F5344CB8AC3E}">
@@ -8568,85 +7404,39 @@
 </p:sld>
 </file>
 
-<file path=ppt/slides/slide19.xml><?xml version="1.0" encoding="utf-8"?>
-<p:sld xmlns:a="http://schemas.openxmlformats.org/drawingml/2006/main" xmlns:p="http://schemas.openxmlformats.org/presentationml/2006/main" xmlns:r="http://schemas.openxmlformats.org/officeDocument/2006/relationships">
+<file path=ppt/slides/slide16.xml><?xml version="1.0" encoding="utf-8"?>
+<p:sld xmlns:a="http://schemas.openxmlformats.org/drawingml/2006/main" xmlns:r="http://schemas.openxmlformats.org/officeDocument/2006/relationships" xmlns:p="http://schemas.openxmlformats.org/presentationml/2006/main">
   <p:cSld>
-    <p:bg>
-      <p:bgPr>
-        <a:solidFill>
-          <a:srgbClr val="E6CCCC"/>
-        </a:solidFill>
-        <a:effectLst/>
-      </p:bgPr>
-    </p:bg>
     <p:spTree>
       <p:nvGrpSpPr>
         <p:cNvPr id="1" name=""/>
         <p:cNvGrpSpPr/>
         <p:nvPr/>
       </p:nvGrpSpPr>
-      <p:grpSpPr/>
+      <p:grpSpPr>
+        <a:xfrm>
+          <a:off x="0" y="0"/>
+          <a:ext cx="0" cy="0"/>
+          <a:chOff x="0" y="0"/>
+          <a:chExt cx="0" cy="0"/>
+        </a:xfrm>
+      </p:grpSpPr>
       <p:sp>
         <p:nvSpPr>
-          <p:cNvPr id="2" name="Oval 1"/>
-          <p:cNvSpPr/>
-          <p:nvPr/>
-        </p:nvSpPr>
-        <p:spPr>
-          <a:xfrm>
-            <a:off x="5775960" y="457200"/>
-            <a:ext cx="640080" cy="640080"/>
-          </a:xfrm>
-          <a:prstGeom prst="ellipse">
-            <a:avLst/>
-          </a:prstGeom>
-          <a:solidFill>
-            <a:srgbClr val="8A3B3F"/>
-          </a:solidFill>
-          <a:ln>
-            <a:noFill/>
-          </a:ln>
-        </p:spPr>
-        <p:style>
-          <a:lnRef idx="1">
-            <a:schemeClr val="accent1"/>
-          </a:lnRef>
-          <a:fillRef idx="3">
-            <a:schemeClr val="accent1"/>
-          </a:fillRef>
-          <a:effectRef idx="2">
-            <a:schemeClr val="accent1"/>
-          </a:effectRef>
-          <a:fontRef idx="minor">
-            <a:schemeClr val="lt1"/>
-          </a:fontRef>
-        </p:style>
-        <p:txBody>
-          <a:bodyPr rtlCol="0" anchor="ctr" wrap="none"/>
-          <a:lstStyle/>
-          <a:p>
-            <a:pPr algn="ctr"/>
-            <a:r>
-              <a:rPr sz="2800" b="1">
-                <a:solidFill>
-                  <a:srgbClr val="FFFFFF"/>
-                </a:solidFill>
-              </a:rPr>
-              <a:t>!</a:t>
-            </a:r>
-          </a:p>
-        </p:txBody>
-      </p:sp>
-      <p:sp>
-        <p:nvSpPr>
-          <p:cNvPr id="3" name="TextBox 2"/>
+          <p:cNvPr id="6" name="CaixaDeTexto 5">
+            <a:extLst>
+              <a:ext uri="{FF2B5EF4-FFF2-40B4-BE49-F238E27FC236}">
+                <a16:creationId xmlns:a16="http://schemas.microsoft.com/office/drawing/2014/main" id="{720B10DA-C761-4DEE-8D86-E170E1C2E981}"/>
+              </a:ext>
+            </a:extLst>
+          </p:cNvPr>
           <p:cNvSpPr txBox="1"/>
           <p:nvPr/>
         </p:nvSpPr>
         <p:spPr>
           <a:xfrm>
-            <a:off x="914400" y="1371600"/>
-            <a:ext cx="10363200" cy="457200"/>
+            <a:off x="881687" y="1441868"/>
+            <a:ext cx="10067277" cy="3086871"/>
           </a:xfrm>
           <a:prstGeom prst="rect">
             <a:avLst/>
@@ -8654,33 +7444,122 @@
           <a:noFill/>
         </p:spPr>
         <p:txBody>
-          <a:bodyPr wrap="square">
+          <a:bodyPr wrap="square" rtlCol="0">
             <a:spAutoFit/>
           </a:bodyPr>
           <a:lstStyle/>
           <a:p>
-            <a:pPr algn="ctr"/>
-            <a:r>
-              <a:rPr sz="1800" b="1" i="0">
-                <a:solidFill>
-                  <a:srgbClr val="8A3B3F"/>
-                </a:solidFill>
-              </a:rPr>
-              <a:t>VERIFICAÇÃO RÁPIDA</a:t>
+            <a:pPr>
+              <a:lnSpc>
+                <a:spcPct val="150000"/>
+              </a:lnSpc>
+            </a:pPr>
+            <a:r>
+              <a:rPr lang="pt-BR" sz="2200" b="1" dirty="0"/>
+              <a:t>Atividades referentes à aula</a:t>
+            </a:r>
+          </a:p>
+          <a:p>
+            <a:pPr>
+              <a:lnSpc>
+                <a:spcPct val="150000"/>
+              </a:lnSpc>
+            </a:pPr>
+            <a:r>
+              <a:rPr lang="pt-BR" sz="2200" dirty="0"/>
+              <a:t>Leitura recomendada: </a:t>
+            </a:r>
+          </a:p>
+          <a:p>
+            <a:pPr marL="457178" indent="-457178">
+              <a:lnSpc>
+                <a:spcPct val="150000"/>
+              </a:lnSpc>
+              <a:buFont typeface="Arial" panose="020B0604020202020204" pitchFamily="34" charset="0"/>
+              <a:buChar char="•"/>
+            </a:pPr>
+            <a:r>
+              <a:rPr lang="pt-BR" sz="2200" dirty="0"/>
+              <a:t>Bussab &amp; </a:t>
+            </a:r>
+            <a:r>
+              <a:rPr lang="pt-BR" sz="2200" dirty="0" err="1"/>
+              <a:t>Morettin</a:t>
+            </a:r>
+            <a:r>
+              <a:rPr lang="pt-BR" sz="2200" dirty="0"/>
+              <a:t> — Cap. 5: 5.4</a:t>
+            </a:r>
+          </a:p>
+          <a:p>
+            <a:pPr marL="457178" indent="-457178">
+              <a:lnSpc>
+                <a:spcPct val="150000"/>
+              </a:lnSpc>
+              <a:buFont typeface="Arial" panose="020B0604020202020204" pitchFamily="34" charset="0"/>
+              <a:buChar char="•"/>
+            </a:pPr>
+            <a:r>
+              <a:rPr lang="pt-BR" sz="2200" dirty="0"/>
+              <a:t>Montgomery &amp; </a:t>
+            </a:r>
+            <a:r>
+              <a:rPr lang="pt-BR" sz="2200" dirty="0" err="1"/>
+              <a:t>Runger</a:t>
+            </a:r>
+            <a:r>
+              <a:rPr lang="pt-BR" sz="2200" dirty="0"/>
+              <a:t> — Cap. 2: 2.6, 2.8</a:t>
+            </a:r>
+          </a:p>
+          <a:p>
+            <a:pPr marL="457178" indent="-457178">
+              <a:lnSpc>
+                <a:spcPct val="150000"/>
+              </a:lnSpc>
+              <a:buFont typeface="Arial" panose="020B0604020202020204" pitchFamily="34" charset="0"/>
+              <a:buChar char="•"/>
+            </a:pPr>
+            <a:r>
+              <a:rPr lang="pt-BR" sz="2200" dirty="0"/>
+              <a:t>Magalhães &amp; Lima — Cap. 2: 2.2</a:t>
+            </a:r>
+          </a:p>
+          <a:p>
+            <a:pPr marL="457178" indent="-457178">
+              <a:lnSpc>
+                <a:spcPct val="150000"/>
+              </a:lnSpc>
+              <a:buFont typeface="Arial" panose="020B0604020202020204" pitchFamily="34" charset="0"/>
+              <a:buChar char="•"/>
+            </a:pPr>
+            <a:r>
+              <a:rPr lang="pt-BR" sz="2200" dirty="0" err="1"/>
+              <a:t>Morettin</a:t>
+            </a:r>
+            <a:r>
+              <a:rPr lang="pt-BR" sz="2200" dirty="0"/>
+              <a:t> — Cap. 2: 2.6</a:t>
             </a:r>
           </a:p>
         </p:txBody>
       </p:sp>
       <p:sp>
         <p:nvSpPr>
-          <p:cNvPr id="4" name="TextBox 3"/>
+          <p:cNvPr id="3" name="CaixaDeTexto 2">
+            <a:extLst>
+              <a:ext uri="{FF2B5EF4-FFF2-40B4-BE49-F238E27FC236}">
+                <a16:creationId xmlns:a16="http://schemas.microsoft.com/office/drawing/2014/main" id="{19131A04-B5D6-4211-8B49-4615DE5797E9}"/>
+              </a:ext>
+            </a:extLst>
+          </p:cNvPr>
           <p:cNvSpPr txBox="1"/>
           <p:nvPr/>
         </p:nvSpPr>
         <p:spPr>
           <a:xfrm>
-            <a:off x="1188720" y="2103120"/>
-            <a:ext cx="9814560" cy="1167371"/>
+            <a:off x="361395" y="6488668"/>
+            <a:ext cx="7620000" cy="300210"/>
           </a:xfrm>
           <a:prstGeom prst="rect">
             <a:avLst/>
@@ -8688,33 +7567,64 @@
           <a:noFill/>
         </p:spPr>
         <p:txBody>
-          <a:bodyPr wrap="square">
+          <a:bodyPr wrap="none" rtlCol="0">
             <a:spAutoFit/>
           </a:bodyPr>
           <a:lstStyle/>
           <a:p>
-            <a:pPr algn="ctr"/>
-            <a:r>
-              <a:rPr sz="2800" b="1" i="0">
-                <a:solidFill>
-                  <a:srgbClr val="3D1F21"/>
-                </a:solidFill>
-              </a:rPr>
-              <a:t>"Voltando ao detector de mentiras da Aula 5: sabíamos que o teste falha com probabilidade 0,8 quando a pessoa é realmente ladrão, e queríamos saber qual a probabilidade de um ladrão ser encontrado. Das duas — P(falhou|ladrão) e P(ladrão|falhou) — qual representa o que procurávamos?"</a:t>
+            <a:r>
+              <a:rPr lang="pt-BR" sz="1351" dirty="0"/>
+              <a:t>CEA055 - Estatística e Probabilidade - Professor: Marcos Goulart Lima</a:t>
             </a:r>
           </a:p>
         </p:txBody>
       </p:sp>
+    </p:spTree>
+    <p:extLst>
+      <p:ext uri="{BB962C8B-B14F-4D97-AF65-F5344CB8AC3E}">
+        <p14:creationId xmlns:p14="http://schemas.microsoft.com/office/powerpoint/2010/main" val="1670738953"/>
+      </p:ext>
+    </p:extLst>
+  </p:cSld>
+  <p:clrMapOvr>
+    <a:masterClrMapping/>
+  </p:clrMapOvr>
+</p:sld>
+</file>
+
+<file path=ppt/slides/slide17.xml><?xml version="1.0" encoding="utf-8"?>
+<p:sld xmlns:a="http://schemas.openxmlformats.org/drawingml/2006/main" xmlns:r="http://schemas.openxmlformats.org/officeDocument/2006/relationships" xmlns:p="http://schemas.openxmlformats.org/presentationml/2006/main">
+  <p:cSld>
+    <p:spTree>
+      <p:nvGrpSpPr>
+        <p:cNvPr id="1" name=""/>
+        <p:cNvGrpSpPr/>
+        <p:nvPr/>
+      </p:nvGrpSpPr>
+      <p:grpSpPr>
+        <a:xfrm>
+          <a:off x="0" y="0"/>
+          <a:ext cx="0" cy="0"/>
+          <a:chOff x="0" y="0"/>
+          <a:chExt cx="0" cy="0"/>
+        </a:xfrm>
+      </p:grpSpPr>
       <p:sp>
         <p:nvSpPr>
-          <p:cNvPr id="5" name="TextBox 4"/>
+          <p:cNvPr id="6" name="CaixaDeTexto 5">
+            <a:extLst>
+              <a:ext uri="{FF2B5EF4-FFF2-40B4-BE49-F238E27FC236}">
+                <a16:creationId xmlns:a16="http://schemas.microsoft.com/office/drawing/2014/main" id="{720B10DA-C761-4DEE-8D86-E170E1C2E981}"/>
+              </a:ext>
+            </a:extLst>
+          </p:cNvPr>
           <p:cNvSpPr txBox="1"/>
           <p:nvPr/>
         </p:nvSpPr>
         <p:spPr>
           <a:xfrm>
-            <a:off x="914400" y="5577840"/>
-            <a:ext cx="10363200" cy="457200"/>
+            <a:off x="881687" y="1441868"/>
+            <a:ext cx="10067277" cy="2579039"/>
           </a:xfrm>
           <a:prstGeom prst="rect">
             <a:avLst/>
@@ -8722,33 +7632,94 @@
           <a:noFill/>
         </p:spPr>
         <p:txBody>
-          <a:bodyPr wrap="square">
+          <a:bodyPr wrap="square" rtlCol="0">
             <a:spAutoFit/>
           </a:bodyPr>
           <a:lstStyle/>
           <a:p>
-            <a:pPr algn="ctr"/>
-            <a:r>
-              <a:rPr sz="1600" b="0" i="1">
-                <a:solidFill>
-                  <a:srgbClr val="8A5C5E"/>
-                </a:solidFill>
-              </a:rPr>
-              <a:t>Sorteie um aluno antes de continuar</a:t>
+            <a:pPr>
+              <a:lnSpc>
+                <a:spcPct val="150000"/>
+              </a:lnSpc>
+            </a:pPr>
+            <a:r>
+              <a:rPr lang="pt-BR" sz="2200" b="1" dirty="0"/>
+              <a:t>Exercícios recomendados:</a:t>
+            </a:r>
+          </a:p>
+          <a:p>
+            <a:pPr marL="457178" indent="-457178">
+              <a:lnSpc>
+                <a:spcPct val="150000"/>
+              </a:lnSpc>
+              <a:buFont typeface="Arial" panose="020B0604020202020204" pitchFamily="34" charset="0"/>
+              <a:buChar char="•"/>
+            </a:pPr>
+            <a:r>
+              <a:rPr lang="pt-BR" sz="2200" dirty="0"/>
+              <a:t>Bussab &amp; </a:t>
+            </a:r>
+            <a:r>
+              <a:rPr lang="pt-BR" sz="2200" dirty="0" err="1"/>
+              <a:t>Morettin</a:t>
+            </a:r>
+            <a:r>
+              <a:rPr lang="pt-BR" sz="2200" dirty="0"/>
+              <a:t> — Cap. 5: Problemas 23, 24, 25, 26, 27 e 37</a:t>
+            </a:r>
+          </a:p>
+          <a:p>
+            <a:pPr marL="457178" indent="-457178">
+              <a:lnSpc>
+                <a:spcPct val="150000"/>
+              </a:lnSpc>
+              <a:buFont typeface="Arial" panose="020B0604020202020204" pitchFamily="34" charset="0"/>
+              <a:buChar char="•"/>
+            </a:pPr>
+            <a:r>
+              <a:rPr lang="pt-BR" sz="2200" dirty="0"/>
+              <a:t>Magalhães &amp; Lima — Cap. 2 (§2.3): Exercícios 18, 25, 26, 28 e 29</a:t>
+            </a:r>
+          </a:p>
+          <a:p>
+            <a:pPr marL="457178" indent="-457178">
+              <a:lnSpc>
+                <a:spcPct val="150000"/>
+              </a:lnSpc>
+              <a:buFont typeface="Arial" panose="020B0604020202020204" pitchFamily="34" charset="0"/>
+              <a:buChar char="•"/>
+            </a:pPr>
+            <a:r>
+              <a:rPr lang="pt-BR" sz="2200" dirty="0"/>
+              <a:t>Montgomery &amp; </a:t>
+            </a:r>
+            <a:r>
+              <a:rPr lang="pt-BR" sz="2200" dirty="0" err="1"/>
+              <a:t>Runger</a:t>
+            </a:r>
+            <a:r>
+              <a:rPr lang="pt-BR" sz="2200" dirty="0"/>
+              <a:t> — Cap. 2: Exercícios 2.6.1, 2.6.3, 2.6.4, 2.6.6, 2.6.7, 2.8.1, 2.8.3, 2.8.4, 2.8.7 e 2.8.9</a:t>
             </a:r>
           </a:p>
         </p:txBody>
       </p:sp>
       <p:sp>
         <p:nvSpPr>
-          <p:cNvPr id="6" name="TextBox 5"/>
+          <p:cNvPr id="3" name="CaixaDeTexto 2">
+            <a:extLst>
+              <a:ext uri="{FF2B5EF4-FFF2-40B4-BE49-F238E27FC236}">
+                <a16:creationId xmlns:a16="http://schemas.microsoft.com/office/drawing/2014/main" id="{19131A04-B5D6-4211-8B49-4615DE5797E9}"/>
+              </a:ext>
+            </a:extLst>
+          </p:cNvPr>
           <p:cNvSpPr txBox="1"/>
           <p:nvPr/>
         </p:nvSpPr>
         <p:spPr>
           <a:xfrm>
-            <a:off x="361188" y="6463893"/>
-            <a:ext cx="7772400" cy="308152"/>
+            <a:off x="361395" y="6488668"/>
+            <a:ext cx="7620000" cy="300210"/>
           </a:xfrm>
           <a:prstGeom prst="rect">
             <a:avLst/>
@@ -8756,24 +7727,24 @@
           <a:noFill/>
         </p:spPr>
         <p:txBody>
-          <a:bodyPr wrap="none">
+          <a:bodyPr wrap="none" rtlCol="0">
             <a:spAutoFit/>
           </a:bodyPr>
           <a:lstStyle/>
           <a:p>
-            <a:pPr algn="l"/>
-            <a:r>
-              <a:rPr sz="1400" b="0" i="0">
-                <a:solidFill>
-                  <a:srgbClr val="595959"/>
-                </a:solidFill>
-              </a:rPr>
-              <a:t>CEA055 – Estatística e Probabilidade – Prof. Marcos Goulart Lima</a:t>
+            <a:r>
+              <a:rPr lang="pt-BR" sz="1351" dirty="0"/>
+              <a:t>CEA055 - Estatística e Probabilidade - Professor: Marcos Goulart Lima</a:t>
             </a:r>
           </a:p>
         </p:txBody>
       </p:sp>
     </p:spTree>
+    <p:extLst>
+      <p:ext uri="{BB962C8B-B14F-4D97-AF65-F5344CB8AC3E}">
+        <p14:creationId xmlns:p14="http://schemas.microsoft.com/office/powerpoint/2010/main" val="1849096640"/>
+      </p:ext>
+    </p:extLst>
   </p:cSld>
   <p:clrMapOvr>
     <a:masterClrMapping/>
@@ -8798,58 +7769,8 @@
           <a:chExt cx="0" cy="0"/>
         </a:xfrm>
       </p:grpSpPr>
-      <p:sp>
-        <p:nvSpPr>
-          <p:cNvPr id="2" name="Título 1">
-            <a:extLst>
-              <a:ext uri="{FF2B5EF4-FFF2-40B4-BE49-F238E27FC236}">
-                <a16:creationId xmlns:a16="http://schemas.microsoft.com/office/drawing/2014/main" id="{BC798918-7CB4-450A-A042-F0B538CA25DE}"/>
-              </a:ext>
-            </a:extLst>
-          </p:cNvPr>
-          <p:cNvSpPr>
-            <a:spLocks noGrp="1"/>
-          </p:cNvSpPr>
-          <p:nvPr>
-            <p:ph type="title"/>
-          </p:nvPr>
-        </p:nvSpPr>
-        <p:spPr>
-          <a:xfrm>
-            <a:off x="1032611" y="0"/>
-            <a:ext cx="10827959" cy="1574800"/>
-          </a:xfrm>
-        </p:spPr>
-        <p:txBody>
-          <a:bodyPr>
-            <a:normAutofit/>
-          </a:bodyPr>
-          <a:lstStyle/>
-          <a:p>
-            <a:pPr algn="ctr"/>
-            <a:r>
-              <a:rPr lang="pt-BR" dirty="0">
-                <a:latin typeface="AlternateGothic2 BT" panose="020B0608020202050204" pitchFamily="34" charset="0"/>
-              </a:rPr>
-              <a:t>CEA055 – Estatística e Probabilidade</a:t>
-            </a:r>
-            <a:br>
-              <a:rPr lang="pt-BR" dirty="0">
-                <a:latin typeface="AlternateGothic2 BT" panose="020B0608020202050204" pitchFamily="34" charset="0"/>
-              </a:rPr>
-            </a:br>
-            <a:r>
-              <a:rPr lang="pt-BR" sz="2200" b="1" dirty="0"/>
-              <a:t>Probabilidade Total e Bayes</a:t>
-            </a:r>
-            <a:endParaRPr lang="pt-BR" dirty="0">
-              <a:latin typeface="AlternateGothic2 BT" panose="020B0608020202050204" pitchFamily="34" charset="0"/>
-            </a:endParaRPr>
-          </a:p>
-        </p:txBody>
-      </p:sp>
-      <mc:AlternateContent xmlns:mc="http://schemas.openxmlformats.org/markup-compatibility/2006">
-        <mc:Choice xmlns:a14="http://schemas.microsoft.com/office/drawing/2010/main" Requires="a14">
+      <mc:AlternateContent xmlns:mc="http://schemas.openxmlformats.org/markup-compatibility/2006" xmlns:a14="http://schemas.microsoft.com/office/drawing/2010/main">
+        <mc:Choice Requires="a14">
           <p:sp>
             <p:nvSpPr>
               <p:cNvPr id="6" name="CaixaDeTexto 5">
@@ -9212,7 +8133,7 @@
             </p:txBody>
           </p:sp>
         </mc:Choice>
-        <mc:Fallback>
+        <mc:Fallback xmlns="">
           <p:sp>
             <p:nvSpPr>
               <p:cNvPr id="6" name="CaixaDeTexto 5">
@@ -9272,7 +8193,7 @@
         <p:spPr>
           <a:xfrm>
             <a:off x="361395" y="6488668"/>
-            <a:ext cx="2395336" cy="300210"/>
+            <a:ext cx="7620000" cy="300210"/>
           </a:xfrm>
           <a:prstGeom prst="rect">
             <a:avLst/>
@@ -9287,571 +8208,15 @@
           <a:p>
             <a:r>
               <a:rPr lang="pt-BR" sz="1351" dirty="0"/>
-              <a:t>Professor: Marcos Goulart Lima</a:t>
+              <a:t>CEA055 - Estatística e Probabilidade - Professor: Marcos Goulart Lima</a:t>
             </a:r>
           </a:p>
         </p:txBody>
       </p:sp>
-      <p:pic>
-        <p:nvPicPr>
-          <p:cNvPr id="8" name="Espaço Reservado para Conteúdo 4">
-            <a:extLst>
-              <a:ext uri="{FF2B5EF4-FFF2-40B4-BE49-F238E27FC236}">
-                <a16:creationId xmlns:a16="http://schemas.microsoft.com/office/drawing/2014/main" id="{65AB402D-D1A8-4F31-BA42-34A6F0FC69F9}"/>
-              </a:ext>
-            </a:extLst>
-          </p:cNvPr>
-          <p:cNvPicPr>
-            <a:picLocks noChangeAspect="1"/>
-          </p:cNvPicPr>
-          <p:nvPr/>
-        </p:nvPicPr>
-        <p:blipFill>
-          <a:blip r:embed="rId3">
-            <a:extLst>
-              <a:ext uri="{28A0092B-C50C-407E-A947-70E740481C1C}">
-                <a14:useLocalDpi xmlns:a14="http://schemas.microsoft.com/office/drawing/2010/main" val="0"/>
-              </a:ext>
-            </a:extLst>
-          </a:blip>
-          <a:stretch>
-            <a:fillRect/>
-          </a:stretch>
-        </p:blipFill>
-        <p:spPr>
-          <a:xfrm>
-            <a:off x="62144" y="112237"/>
-            <a:ext cx="588096" cy="1228523"/>
-          </a:xfrm>
-          <a:prstGeom prst="rect">
-            <a:avLst/>
-          </a:prstGeom>
-        </p:spPr>
-      </p:pic>
     </p:spTree>
     <p:extLst>
       <p:ext uri="{BB962C8B-B14F-4D97-AF65-F5344CB8AC3E}">
         <p14:creationId xmlns:p14="http://schemas.microsoft.com/office/powerpoint/2010/main" val="3326678858"/>
-      </p:ext>
-    </p:extLst>
-  </p:cSld>
-  <p:clrMapOvr>
-    <a:masterClrMapping/>
-  </p:clrMapOvr>
-</p:sld>
-</file>
-
-<file path=ppt/slides/slide20.xml><?xml version="1.0" encoding="utf-8"?>
-<p:sld xmlns:a="http://schemas.openxmlformats.org/drawingml/2006/main" xmlns:r="http://schemas.openxmlformats.org/officeDocument/2006/relationships" xmlns:p="http://schemas.openxmlformats.org/presentationml/2006/main">
-  <p:cSld>
-    <p:spTree>
-      <p:nvGrpSpPr>
-        <p:cNvPr id="1" name=""/>
-        <p:cNvGrpSpPr/>
-        <p:nvPr/>
-      </p:nvGrpSpPr>
-      <p:grpSpPr>
-        <a:xfrm>
-          <a:off x="0" y="0"/>
-          <a:ext cx="0" cy="0"/>
-          <a:chOff x="0" y="0"/>
-          <a:chExt cx="0" cy="0"/>
-        </a:xfrm>
-      </p:grpSpPr>
-      <p:sp>
-        <p:nvSpPr>
-          <p:cNvPr id="2" name="Título 1">
-            <a:extLst>
-              <a:ext uri="{FF2B5EF4-FFF2-40B4-BE49-F238E27FC236}">
-                <a16:creationId xmlns:a16="http://schemas.microsoft.com/office/drawing/2014/main" id="{BC798918-7CB4-450A-A042-F0B538CA25DE}"/>
-              </a:ext>
-            </a:extLst>
-          </p:cNvPr>
-          <p:cNvSpPr>
-            <a:spLocks noGrp="1"/>
-          </p:cNvSpPr>
-          <p:nvPr>
-            <p:ph type="title"/>
-          </p:nvPr>
-        </p:nvSpPr>
-        <p:spPr>
-          <a:xfrm>
-            <a:off x="1032611" y="0"/>
-            <a:ext cx="10827959" cy="1574800"/>
-          </a:xfrm>
-        </p:spPr>
-        <p:txBody>
-          <a:bodyPr>
-            <a:normAutofit/>
-          </a:bodyPr>
-          <a:lstStyle/>
-          <a:p>
-            <a:pPr algn="ctr"/>
-            <a:r>
-              <a:rPr lang="pt-BR" dirty="0">
-                <a:latin typeface="AlternateGothic2 BT" panose="020B0608020202050204" pitchFamily="34" charset="0"/>
-              </a:rPr>
-              <a:t>CEA055 – Estatística e Probabilidade</a:t>
-            </a:r>
-            <a:br>
-              <a:rPr lang="pt-BR" dirty="0">
-                <a:latin typeface="AlternateGothic2 BT" panose="020B0608020202050204" pitchFamily="34" charset="0"/>
-              </a:rPr>
-            </a:br>
-            <a:r>
-              <a:rPr lang="pt-BR" sz="2200" b="1" dirty="0"/>
-              <a:t>Probabilidade Total e Bayes — Atividades</a:t>
-            </a:r>
-            <a:endParaRPr lang="pt-BR" dirty="0">
-              <a:latin typeface="AlternateGothic2 BT" panose="020B0608020202050204" pitchFamily="34" charset="0"/>
-            </a:endParaRPr>
-          </a:p>
-        </p:txBody>
-      </p:sp>
-      <p:sp>
-        <p:nvSpPr>
-          <p:cNvPr id="6" name="CaixaDeTexto 5">
-            <a:extLst>
-              <a:ext uri="{FF2B5EF4-FFF2-40B4-BE49-F238E27FC236}">
-                <a16:creationId xmlns:a16="http://schemas.microsoft.com/office/drawing/2014/main" id="{720B10DA-C761-4DEE-8D86-E170E1C2E981}"/>
-              </a:ext>
-            </a:extLst>
-          </p:cNvPr>
-          <p:cNvSpPr txBox="1"/>
-          <p:nvPr/>
-        </p:nvSpPr>
-        <p:spPr>
-          <a:xfrm>
-            <a:off x="881687" y="1441868"/>
-            <a:ext cx="10067277" cy="3086871"/>
-          </a:xfrm>
-          <a:prstGeom prst="rect">
-            <a:avLst/>
-          </a:prstGeom>
-          <a:noFill/>
-        </p:spPr>
-        <p:txBody>
-          <a:bodyPr wrap="square" rtlCol="0">
-            <a:spAutoFit/>
-          </a:bodyPr>
-          <a:lstStyle/>
-          <a:p>
-            <a:pPr>
-              <a:lnSpc>
-                <a:spcPct val="150000"/>
-              </a:lnSpc>
-            </a:pPr>
-            <a:r>
-              <a:rPr lang="pt-BR" sz="2200" b="1" dirty="0"/>
-              <a:t>Atividades referentes à aula</a:t>
-            </a:r>
-          </a:p>
-          <a:p>
-            <a:pPr>
-              <a:lnSpc>
-                <a:spcPct val="150000"/>
-              </a:lnSpc>
-            </a:pPr>
-            <a:r>
-              <a:rPr lang="pt-BR" sz="2200" dirty="0"/>
-              <a:t>Leitura recomendada: </a:t>
-            </a:r>
-          </a:p>
-          <a:p>
-            <a:pPr marL="457178" indent="-457178">
-              <a:lnSpc>
-                <a:spcPct val="150000"/>
-              </a:lnSpc>
-              <a:buFont typeface="Arial" panose="020B0604020202020204" pitchFamily="34" charset="0"/>
-              <a:buChar char="•"/>
-            </a:pPr>
-            <a:r>
-              <a:rPr lang="pt-BR" sz="2200" dirty="0"/>
-              <a:t>Bussab &amp; </a:t>
-            </a:r>
-            <a:r>
-              <a:rPr lang="pt-BR" sz="2200" dirty="0" err="1"/>
-              <a:t>Morettin</a:t>
-            </a:r>
-            <a:r>
-              <a:rPr lang="pt-BR" sz="2200" dirty="0"/>
-              <a:t> — Cap. 5: 5.4</a:t>
-            </a:r>
-          </a:p>
-          <a:p>
-            <a:pPr marL="457178" indent="-457178">
-              <a:lnSpc>
-                <a:spcPct val="150000"/>
-              </a:lnSpc>
-              <a:buFont typeface="Arial" panose="020B0604020202020204" pitchFamily="34" charset="0"/>
-              <a:buChar char="•"/>
-            </a:pPr>
-            <a:r>
-              <a:rPr lang="pt-BR" sz="2200" dirty="0"/>
-              <a:t>Montgomery &amp; </a:t>
-            </a:r>
-            <a:r>
-              <a:rPr lang="pt-BR" sz="2200" dirty="0" err="1"/>
-              <a:t>Runger</a:t>
-            </a:r>
-            <a:r>
-              <a:rPr lang="pt-BR" sz="2200" dirty="0"/>
-              <a:t> — Cap. 2: 2.6, 2.8</a:t>
-            </a:r>
-          </a:p>
-          <a:p>
-            <a:pPr marL="457178" indent="-457178">
-              <a:lnSpc>
-                <a:spcPct val="150000"/>
-              </a:lnSpc>
-              <a:buFont typeface="Arial" panose="020B0604020202020204" pitchFamily="34" charset="0"/>
-              <a:buChar char="•"/>
-            </a:pPr>
-            <a:r>
-              <a:rPr lang="pt-BR" sz="2200" dirty="0"/>
-              <a:t>Magalhães &amp; Lima — Cap. 2: 2.2</a:t>
-            </a:r>
-          </a:p>
-          <a:p>
-            <a:pPr marL="457178" indent="-457178">
-              <a:lnSpc>
-                <a:spcPct val="150000"/>
-              </a:lnSpc>
-              <a:buFont typeface="Arial" panose="020B0604020202020204" pitchFamily="34" charset="0"/>
-              <a:buChar char="•"/>
-            </a:pPr>
-            <a:r>
-              <a:rPr lang="pt-BR" sz="2200" dirty="0" err="1"/>
-              <a:t>Morettin</a:t>
-            </a:r>
-            <a:r>
-              <a:rPr lang="pt-BR" sz="2200" dirty="0"/>
-              <a:t> — Cap. 2: 2.6</a:t>
-            </a:r>
-          </a:p>
-        </p:txBody>
-      </p:sp>
-      <p:sp>
-        <p:nvSpPr>
-          <p:cNvPr id="3" name="CaixaDeTexto 2">
-            <a:extLst>
-              <a:ext uri="{FF2B5EF4-FFF2-40B4-BE49-F238E27FC236}">
-                <a16:creationId xmlns:a16="http://schemas.microsoft.com/office/drawing/2014/main" id="{19131A04-B5D6-4211-8B49-4615DE5797E9}"/>
-              </a:ext>
-            </a:extLst>
-          </p:cNvPr>
-          <p:cNvSpPr txBox="1"/>
-          <p:nvPr/>
-        </p:nvSpPr>
-        <p:spPr>
-          <a:xfrm>
-            <a:off x="361395" y="6488668"/>
-            <a:ext cx="2395336" cy="300210"/>
-          </a:xfrm>
-          <a:prstGeom prst="rect">
-            <a:avLst/>
-          </a:prstGeom>
-          <a:noFill/>
-        </p:spPr>
-        <p:txBody>
-          <a:bodyPr wrap="none" rtlCol="0">
-            <a:spAutoFit/>
-          </a:bodyPr>
-          <a:lstStyle/>
-          <a:p>
-            <a:r>
-              <a:rPr lang="pt-BR" sz="1351" dirty="0"/>
-              <a:t>Professor: Marcos Goulart Lima</a:t>
-            </a:r>
-          </a:p>
-        </p:txBody>
-      </p:sp>
-      <p:pic>
-        <p:nvPicPr>
-          <p:cNvPr id="8" name="Espaço Reservado para Conteúdo 4">
-            <a:extLst>
-              <a:ext uri="{FF2B5EF4-FFF2-40B4-BE49-F238E27FC236}">
-                <a16:creationId xmlns:a16="http://schemas.microsoft.com/office/drawing/2014/main" id="{65AB402D-D1A8-4F31-BA42-34A6F0FC69F9}"/>
-              </a:ext>
-            </a:extLst>
-          </p:cNvPr>
-          <p:cNvPicPr>
-            <a:picLocks noChangeAspect="1"/>
-          </p:cNvPicPr>
-          <p:nvPr/>
-        </p:nvPicPr>
-        <p:blipFill>
-          <a:blip r:embed="rId2">
-            <a:extLst>
-              <a:ext uri="{28A0092B-C50C-407E-A947-70E740481C1C}">
-                <a14:useLocalDpi xmlns:a14="http://schemas.microsoft.com/office/drawing/2010/main" val="0"/>
-              </a:ext>
-            </a:extLst>
-          </a:blip>
-          <a:stretch>
-            <a:fillRect/>
-          </a:stretch>
-        </p:blipFill>
-        <p:spPr>
-          <a:xfrm>
-            <a:off x="62144" y="112237"/>
-            <a:ext cx="588096" cy="1228523"/>
-          </a:xfrm>
-          <a:prstGeom prst="rect">
-            <a:avLst/>
-          </a:prstGeom>
-        </p:spPr>
-      </p:pic>
-    </p:spTree>
-    <p:extLst>
-      <p:ext uri="{BB962C8B-B14F-4D97-AF65-F5344CB8AC3E}">
-        <p14:creationId xmlns:p14="http://schemas.microsoft.com/office/powerpoint/2010/main" val="1670738953"/>
-      </p:ext>
-    </p:extLst>
-  </p:cSld>
-  <p:clrMapOvr>
-    <a:masterClrMapping/>
-  </p:clrMapOvr>
-</p:sld>
-</file>
-
-<file path=ppt/slides/slide21.xml><?xml version="1.0" encoding="utf-8"?>
-<p:sld xmlns:a="http://schemas.openxmlformats.org/drawingml/2006/main" xmlns:r="http://schemas.openxmlformats.org/officeDocument/2006/relationships" xmlns:p="http://schemas.openxmlformats.org/presentationml/2006/main">
-  <p:cSld>
-    <p:spTree>
-      <p:nvGrpSpPr>
-        <p:cNvPr id="1" name=""/>
-        <p:cNvGrpSpPr/>
-        <p:nvPr/>
-      </p:nvGrpSpPr>
-      <p:grpSpPr>
-        <a:xfrm>
-          <a:off x="0" y="0"/>
-          <a:ext cx="0" cy="0"/>
-          <a:chOff x="0" y="0"/>
-          <a:chExt cx="0" cy="0"/>
-        </a:xfrm>
-      </p:grpSpPr>
-      <p:sp>
-        <p:nvSpPr>
-          <p:cNvPr id="2" name="Título 1">
-            <a:extLst>
-              <a:ext uri="{FF2B5EF4-FFF2-40B4-BE49-F238E27FC236}">
-                <a16:creationId xmlns:a16="http://schemas.microsoft.com/office/drawing/2014/main" id="{BC798918-7CB4-450A-A042-F0B538CA25DE}"/>
-              </a:ext>
-            </a:extLst>
-          </p:cNvPr>
-          <p:cNvSpPr>
-            <a:spLocks noGrp="1"/>
-          </p:cNvSpPr>
-          <p:nvPr>
-            <p:ph type="title"/>
-          </p:nvPr>
-        </p:nvSpPr>
-        <p:spPr>
-          <a:xfrm>
-            <a:off x="1032611" y="0"/>
-            <a:ext cx="10827959" cy="1574800"/>
-          </a:xfrm>
-        </p:spPr>
-        <p:txBody>
-          <a:bodyPr>
-            <a:normAutofit/>
-          </a:bodyPr>
-          <a:lstStyle/>
-          <a:p>
-            <a:pPr algn="ctr"/>
-            <a:r>
-              <a:rPr lang="pt-BR" dirty="0">
-                <a:latin typeface="AlternateGothic2 BT" panose="020B0608020202050204" pitchFamily="34" charset="0"/>
-              </a:rPr>
-              <a:t>CEA055 – Estatística e Probabilidade</a:t>
-            </a:r>
-            <a:br>
-              <a:rPr lang="pt-BR" dirty="0">
-                <a:latin typeface="AlternateGothic2 BT" panose="020B0608020202050204" pitchFamily="34" charset="0"/>
-              </a:rPr>
-            </a:br>
-            <a:r>
-              <a:rPr lang="pt-BR" sz="2200" b="1" dirty="0"/>
-              <a:t>Probabilidade Total e Bayes — Atividades</a:t>
-            </a:r>
-            <a:endParaRPr lang="pt-BR" dirty="0">
-              <a:latin typeface="AlternateGothic2 BT" panose="020B0608020202050204" pitchFamily="34" charset="0"/>
-            </a:endParaRPr>
-          </a:p>
-        </p:txBody>
-      </p:sp>
-      <p:sp>
-        <p:nvSpPr>
-          <p:cNvPr id="6" name="CaixaDeTexto 5">
-            <a:extLst>
-              <a:ext uri="{FF2B5EF4-FFF2-40B4-BE49-F238E27FC236}">
-                <a16:creationId xmlns:a16="http://schemas.microsoft.com/office/drawing/2014/main" id="{720B10DA-C761-4DEE-8D86-E170E1C2E981}"/>
-              </a:ext>
-            </a:extLst>
-          </p:cNvPr>
-          <p:cNvSpPr txBox="1"/>
-          <p:nvPr/>
-        </p:nvSpPr>
-        <p:spPr>
-          <a:xfrm>
-            <a:off x="881687" y="1441868"/>
-            <a:ext cx="10067277" cy="2579039"/>
-          </a:xfrm>
-          <a:prstGeom prst="rect">
-            <a:avLst/>
-          </a:prstGeom>
-          <a:noFill/>
-        </p:spPr>
-        <p:txBody>
-          <a:bodyPr wrap="square" rtlCol="0">
-            <a:spAutoFit/>
-          </a:bodyPr>
-          <a:lstStyle/>
-          <a:p>
-            <a:pPr>
-              <a:lnSpc>
-                <a:spcPct val="150000"/>
-              </a:lnSpc>
-            </a:pPr>
-            <a:r>
-              <a:rPr lang="pt-BR" sz="2200" b="1" dirty="0"/>
-              <a:t>Exercícios recomendados:</a:t>
-            </a:r>
-          </a:p>
-          <a:p>
-            <a:pPr marL="457178" indent="-457178">
-              <a:lnSpc>
-                <a:spcPct val="150000"/>
-              </a:lnSpc>
-              <a:buFont typeface="Arial" panose="020B0604020202020204" pitchFamily="34" charset="0"/>
-              <a:buChar char="•"/>
-            </a:pPr>
-            <a:r>
-              <a:rPr lang="pt-BR" sz="2200" dirty="0"/>
-              <a:t>Bussab &amp; </a:t>
-            </a:r>
-            <a:r>
-              <a:rPr lang="pt-BR" sz="2200" dirty="0" err="1"/>
-              <a:t>Morettin</a:t>
-            </a:r>
-            <a:r>
-              <a:rPr lang="pt-BR" sz="2200" dirty="0"/>
-              <a:t> — Cap. 5: Problemas 23, 24, 25, 26, 27 e 37</a:t>
-            </a:r>
-          </a:p>
-          <a:p>
-            <a:pPr marL="457178" indent="-457178">
-              <a:lnSpc>
-                <a:spcPct val="150000"/>
-              </a:lnSpc>
-              <a:buFont typeface="Arial" panose="020B0604020202020204" pitchFamily="34" charset="0"/>
-              <a:buChar char="•"/>
-            </a:pPr>
-            <a:r>
-              <a:rPr lang="pt-BR" sz="2200" dirty="0"/>
-              <a:t>Magalhães &amp; Lima — Cap. 2 (§2.3): Exercícios 18, 25, 26, 28 e 29</a:t>
-            </a:r>
-          </a:p>
-          <a:p>
-            <a:pPr marL="457178" indent="-457178">
-              <a:lnSpc>
-                <a:spcPct val="150000"/>
-              </a:lnSpc>
-              <a:buFont typeface="Arial" panose="020B0604020202020204" pitchFamily="34" charset="0"/>
-              <a:buChar char="•"/>
-            </a:pPr>
-            <a:r>
-              <a:rPr lang="pt-BR" sz="2200" dirty="0"/>
-              <a:t>Montgomery &amp; </a:t>
-            </a:r>
-            <a:r>
-              <a:rPr lang="pt-BR" sz="2200" dirty="0" err="1"/>
-              <a:t>Runger</a:t>
-            </a:r>
-            <a:r>
-              <a:rPr lang="pt-BR" sz="2200" dirty="0"/>
-              <a:t> — Cap. 2: Exercícios 2.6.1, 2.6.3, 2.6.4, 2.6.6, 2.6.7, 2.8.1, 2.8.3, 2.8.4, 2.8.7 e 2.8.9</a:t>
-            </a:r>
-          </a:p>
-        </p:txBody>
-      </p:sp>
-      <p:sp>
-        <p:nvSpPr>
-          <p:cNvPr id="3" name="CaixaDeTexto 2">
-            <a:extLst>
-              <a:ext uri="{FF2B5EF4-FFF2-40B4-BE49-F238E27FC236}">
-                <a16:creationId xmlns:a16="http://schemas.microsoft.com/office/drawing/2014/main" id="{19131A04-B5D6-4211-8B49-4615DE5797E9}"/>
-              </a:ext>
-            </a:extLst>
-          </p:cNvPr>
-          <p:cNvSpPr txBox="1"/>
-          <p:nvPr/>
-        </p:nvSpPr>
-        <p:spPr>
-          <a:xfrm>
-            <a:off x="361395" y="6488668"/>
-            <a:ext cx="2395336" cy="300210"/>
-          </a:xfrm>
-          <a:prstGeom prst="rect">
-            <a:avLst/>
-          </a:prstGeom>
-          <a:noFill/>
-        </p:spPr>
-        <p:txBody>
-          <a:bodyPr wrap="none" rtlCol="0">
-            <a:spAutoFit/>
-          </a:bodyPr>
-          <a:lstStyle/>
-          <a:p>
-            <a:r>
-              <a:rPr lang="pt-BR" sz="1351" dirty="0"/>
-              <a:t>Professor: Marcos Goulart Lima</a:t>
-            </a:r>
-          </a:p>
-        </p:txBody>
-      </p:sp>
-      <p:pic>
-        <p:nvPicPr>
-          <p:cNvPr id="8" name="Espaço Reservado para Conteúdo 4">
-            <a:extLst>
-              <a:ext uri="{FF2B5EF4-FFF2-40B4-BE49-F238E27FC236}">
-                <a16:creationId xmlns:a16="http://schemas.microsoft.com/office/drawing/2014/main" id="{65AB402D-D1A8-4F31-BA42-34A6F0FC69F9}"/>
-              </a:ext>
-            </a:extLst>
-          </p:cNvPr>
-          <p:cNvPicPr>
-            <a:picLocks noChangeAspect="1"/>
-          </p:cNvPicPr>
-          <p:nvPr/>
-        </p:nvPicPr>
-        <p:blipFill>
-          <a:blip r:embed="rId2">
-            <a:extLst>
-              <a:ext uri="{28A0092B-C50C-407E-A947-70E740481C1C}">
-                <a14:useLocalDpi xmlns:a14="http://schemas.microsoft.com/office/drawing/2010/main" val="0"/>
-              </a:ext>
-            </a:extLst>
-          </a:blip>
-          <a:stretch>
-            <a:fillRect/>
-          </a:stretch>
-        </p:blipFill>
-        <p:spPr>
-          <a:xfrm>
-            <a:off x="62144" y="112237"/>
-            <a:ext cx="588096" cy="1228523"/>
-          </a:xfrm>
-          <a:prstGeom prst="rect">
-            <a:avLst/>
-          </a:prstGeom>
-        </p:spPr>
-      </p:pic>
-    </p:spTree>
-    <p:extLst>
-      <p:ext uri="{BB962C8B-B14F-4D97-AF65-F5344CB8AC3E}">
-        <p14:creationId xmlns:p14="http://schemas.microsoft.com/office/powerpoint/2010/main" val="1849096640"/>
       </p:ext>
     </p:extLst>
   </p:cSld>
@@ -9878,58 +8243,8 @@
           <a:chExt cx="0" cy="0"/>
         </a:xfrm>
       </p:grpSpPr>
-      <p:sp>
-        <p:nvSpPr>
-          <p:cNvPr id="2" name="Título 1">
-            <a:extLst>
-              <a:ext uri="{FF2B5EF4-FFF2-40B4-BE49-F238E27FC236}">
-                <a16:creationId xmlns:a16="http://schemas.microsoft.com/office/drawing/2014/main" id="{BC798918-7CB4-450A-A042-F0B538CA25DE}"/>
-              </a:ext>
-            </a:extLst>
-          </p:cNvPr>
-          <p:cNvSpPr>
-            <a:spLocks noGrp="1"/>
-          </p:cNvSpPr>
-          <p:nvPr>
-            <p:ph type="title"/>
-          </p:nvPr>
-        </p:nvSpPr>
-        <p:spPr>
-          <a:xfrm>
-            <a:off x="1032611" y="0"/>
-            <a:ext cx="10827959" cy="1574800"/>
-          </a:xfrm>
-        </p:spPr>
-        <p:txBody>
-          <a:bodyPr>
-            <a:normAutofit/>
-          </a:bodyPr>
-          <a:lstStyle/>
-          <a:p>
-            <a:pPr algn="ctr"/>
-            <a:r>
-              <a:rPr lang="pt-BR" dirty="0">
-                <a:latin typeface="AlternateGothic2 BT" panose="020B0608020202050204" pitchFamily="34" charset="0"/>
-              </a:rPr>
-              <a:t>CEA055 – Estatística e Probabilidade</a:t>
-            </a:r>
-            <a:br>
-              <a:rPr lang="pt-BR" dirty="0">
-                <a:latin typeface="AlternateGothic2 BT" panose="020B0608020202050204" pitchFamily="34" charset="0"/>
-              </a:rPr>
-            </a:br>
-            <a:r>
-              <a:rPr lang="pt-BR" sz="2200" b="1" dirty="0"/>
-              <a:t>Probabilidade Total e Bayes</a:t>
-            </a:r>
-            <a:endParaRPr lang="pt-BR" dirty="0">
-              <a:latin typeface="AlternateGothic2 BT" panose="020B0608020202050204" pitchFamily="34" charset="0"/>
-            </a:endParaRPr>
-          </a:p>
-        </p:txBody>
-      </p:sp>
-      <mc:AlternateContent xmlns:mc="http://schemas.openxmlformats.org/markup-compatibility/2006">
-        <mc:Choice xmlns:a14="http://schemas.microsoft.com/office/drawing/2010/main" Requires="a14">
+      <mc:AlternateContent xmlns:mc="http://schemas.openxmlformats.org/markup-compatibility/2006" xmlns:a14="http://schemas.microsoft.com/office/drawing/2010/main">
+        <mc:Choice Requires="a14">
           <p:sp>
             <p:nvSpPr>
               <p:cNvPr id="6" name="CaixaDeTexto 5">
@@ -10220,7 +8535,7 @@
             </p:txBody>
           </p:sp>
         </mc:Choice>
-        <mc:Fallback>
+        <mc:Fallback xmlns="">
           <p:sp>
             <p:nvSpPr>
               <p:cNvPr id="6" name="CaixaDeTexto 5">
@@ -10280,7 +8595,7 @@
         <p:spPr>
           <a:xfrm>
             <a:off x="361395" y="6488668"/>
-            <a:ext cx="2395336" cy="300210"/>
+            <a:ext cx="7620000" cy="300210"/>
           </a:xfrm>
           <a:prstGeom prst="rect">
             <a:avLst/>
@@ -10295,47 +8610,11 @@
           <a:p>
             <a:r>
               <a:rPr lang="pt-BR" sz="1351" dirty="0"/>
-              <a:t>Professor: Marcos Goulart Lima</a:t>
+              <a:t>CEA055 - Estatística e Probabilidade - Professor: Marcos Goulart Lima</a:t>
             </a:r>
           </a:p>
         </p:txBody>
       </p:sp>
-      <p:pic>
-        <p:nvPicPr>
-          <p:cNvPr id="8" name="Espaço Reservado para Conteúdo 4">
-            <a:extLst>
-              <a:ext uri="{FF2B5EF4-FFF2-40B4-BE49-F238E27FC236}">
-                <a16:creationId xmlns:a16="http://schemas.microsoft.com/office/drawing/2014/main" id="{65AB402D-D1A8-4F31-BA42-34A6F0FC69F9}"/>
-              </a:ext>
-            </a:extLst>
-          </p:cNvPr>
-          <p:cNvPicPr>
-            <a:picLocks noChangeAspect="1"/>
-          </p:cNvPicPr>
-          <p:nvPr/>
-        </p:nvPicPr>
-        <p:blipFill>
-          <a:blip r:embed="rId3">
-            <a:extLst>
-              <a:ext uri="{28A0092B-C50C-407E-A947-70E740481C1C}">
-                <a14:useLocalDpi xmlns:a14="http://schemas.microsoft.com/office/drawing/2010/main" val="0"/>
-              </a:ext>
-            </a:extLst>
-          </a:blip>
-          <a:stretch>
-            <a:fillRect/>
-          </a:stretch>
-        </p:blipFill>
-        <p:spPr>
-          <a:xfrm>
-            <a:off x="62144" y="112237"/>
-            <a:ext cx="588096" cy="1228523"/>
-          </a:xfrm>
-          <a:prstGeom prst="rect">
-            <a:avLst/>
-          </a:prstGeom>
-        </p:spPr>
-      </p:pic>
     </p:spTree>
     <p:extLst>
       <p:ext uri="{BB962C8B-B14F-4D97-AF65-F5344CB8AC3E}">
@@ -10366,56 +8645,6 @@
           <a:chExt cx="0" cy="0"/>
         </a:xfrm>
       </p:grpSpPr>
-      <p:sp>
-        <p:nvSpPr>
-          <p:cNvPr id="2" name="Título 1">
-            <a:extLst>
-              <a:ext uri="{FF2B5EF4-FFF2-40B4-BE49-F238E27FC236}">
-                <a16:creationId xmlns:a16="http://schemas.microsoft.com/office/drawing/2014/main" id="{BC798918-7CB4-450A-A042-F0B538CA25DE}"/>
-              </a:ext>
-            </a:extLst>
-          </p:cNvPr>
-          <p:cNvSpPr>
-            <a:spLocks noGrp="1"/>
-          </p:cNvSpPr>
-          <p:nvPr>
-            <p:ph type="title"/>
-          </p:nvPr>
-        </p:nvSpPr>
-        <p:spPr>
-          <a:xfrm>
-            <a:off x="1032611" y="0"/>
-            <a:ext cx="10827959" cy="1574800"/>
-          </a:xfrm>
-        </p:spPr>
-        <p:txBody>
-          <a:bodyPr>
-            <a:normAutofit/>
-          </a:bodyPr>
-          <a:lstStyle/>
-          <a:p>
-            <a:pPr algn="ctr"/>
-            <a:r>
-              <a:rPr lang="pt-BR" dirty="0">
-                <a:latin typeface="AlternateGothic2 BT" panose="020B0608020202050204" pitchFamily="34" charset="0"/>
-              </a:rPr>
-              <a:t>CEA055 – Estatística e Probabilidade</a:t>
-            </a:r>
-            <a:br>
-              <a:rPr lang="pt-BR" dirty="0">
-                <a:latin typeface="AlternateGothic2 BT" panose="020B0608020202050204" pitchFamily="34" charset="0"/>
-              </a:rPr>
-            </a:br>
-            <a:r>
-              <a:rPr lang="pt-BR" sz="2200" b="1" dirty="0"/>
-              <a:t>Probabilidade Total e Bayes</a:t>
-            </a:r>
-            <a:endParaRPr lang="pt-BR" dirty="0">
-              <a:latin typeface="AlternateGothic2 BT" panose="020B0608020202050204" pitchFamily="34" charset="0"/>
-            </a:endParaRPr>
-          </a:p>
-        </p:txBody>
-      </p:sp>
       <mc:AlternateContent xmlns:mc="http://schemas.openxmlformats.org/markup-compatibility/2006" xmlns:a14="http://schemas.microsoft.com/office/drawing/2010/main">
         <mc:Choice Requires="a14">
           <p:sp>
@@ -10861,7 +9090,7 @@
         <p:spPr>
           <a:xfrm>
             <a:off x="361395" y="6488668"/>
-            <a:ext cx="2395336" cy="300210"/>
+            <a:ext cx="7620000" cy="300210"/>
           </a:xfrm>
           <a:prstGeom prst="rect">
             <a:avLst/>
@@ -10876,47 +9105,11 @@
           <a:p>
             <a:r>
               <a:rPr lang="pt-BR" sz="1351" dirty="0"/>
-              <a:t>Professor: Marcos Goulart Lima</a:t>
+              <a:t>CEA055 - Estatística e Probabilidade - Professor: Marcos Goulart Lima</a:t>
             </a:r>
           </a:p>
         </p:txBody>
       </p:sp>
-      <p:pic>
-        <p:nvPicPr>
-          <p:cNvPr id="8" name="Espaço Reservado para Conteúdo 4">
-            <a:extLst>
-              <a:ext uri="{FF2B5EF4-FFF2-40B4-BE49-F238E27FC236}">
-                <a16:creationId xmlns:a16="http://schemas.microsoft.com/office/drawing/2014/main" id="{65AB402D-D1A8-4F31-BA42-34A6F0FC69F9}"/>
-              </a:ext>
-            </a:extLst>
-          </p:cNvPr>
-          <p:cNvPicPr>
-            <a:picLocks noChangeAspect="1"/>
-          </p:cNvPicPr>
-          <p:nvPr/>
-        </p:nvPicPr>
-        <p:blipFill>
-          <a:blip r:embed="rId3">
-            <a:extLst>
-              <a:ext uri="{28A0092B-C50C-407E-A947-70E740481C1C}">
-                <a14:useLocalDpi xmlns:a14="http://schemas.microsoft.com/office/drawing/2010/main" val="0"/>
-              </a:ext>
-            </a:extLst>
-          </a:blip>
-          <a:stretch>
-            <a:fillRect/>
-          </a:stretch>
-        </p:blipFill>
-        <p:spPr>
-          <a:xfrm>
-            <a:off x="62144" y="112237"/>
-            <a:ext cx="588096" cy="1228523"/>
-          </a:xfrm>
-          <a:prstGeom prst="rect">
-            <a:avLst/>
-          </a:prstGeom>
-        </p:spPr>
-      </p:pic>
     </p:spTree>
     <p:extLst>
       <p:ext uri="{BB962C8B-B14F-4D97-AF65-F5344CB8AC3E}">
@@ -10949,56 +9142,6 @@
       </p:grpSpPr>
       <p:sp>
         <p:nvSpPr>
-          <p:cNvPr id="2" name="Título 1">
-            <a:extLst>
-              <a:ext uri="{FF2B5EF4-FFF2-40B4-BE49-F238E27FC236}">
-                <a16:creationId xmlns:a16="http://schemas.microsoft.com/office/drawing/2014/main" id="{BC798918-7CB4-450A-A042-F0B538CA25DE}"/>
-              </a:ext>
-            </a:extLst>
-          </p:cNvPr>
-          <p:cNvSpPr>
-            <a:spLocks noGrp="1"/>
-          </p:cNvSpPr>
-          <p:nvPr>
-            <p:ph type="title"/>
-          </p:nvPr>
-        </p:nvSpPr>
-        <p:spPr>
-          <a:xfrm>
-            <a:off x="1032611" y="0"/>
-            <a:ext cx="10827959" cy="1574800"/>
-          </a:xfrm>
-        </p:spPr>
-        <p:txBody>
-          <a:bodyPr>
-            <a:normAutofit/>
-          </a:bodyPr>
-          <a:lstStyle/>
-          <a:p>
-            <a:pPr algn="ctr"/>
-            <a:r>
-              <a:rPr lang="pt-BR" dirty="0">
-                <a:latin typeface="AlternateGothic2 BT" panose="020B0608020202050204" pitchFamily="34" charset="0"/>
-              </a:rPr>
-              <a:t>CEA055 – Estatística e Probabilidade</a:t>
-            </a:r>
-            <a:br>
-              <a:rPr lang="pt-BR" dirty="0">
-                <a:latin typeface="AlternateGothic2 BT" panose="020B0608020202050204" pitchFamily="34" charset="0"/>
-              </a:rPr>
-            </a:br>
-            <a:r>
-              <a:rPr lang="pt-BR" sz="2200" b="1" dirty="0"/>
-              <a:t>Probabilidade Total e Bayes</a:t>
-            </a:r>
-            <a:endParaRPr lang="pt-BR" dirty="0">
-              <a:latin typeface="AlternateGothic2 BT" panose="020B0608020202050204" pitchFamily="34" charset="0"/>
-            </a:endParaRPr>
-          </a:p>
-        </p:txBody>
-      </p:sp>
-      <p:sp>
-        <p:nvSpPr>
           <p:cNvPr id="6" name="CaixaDeTexto 5">
             <a:extLst>
               <a:ext uri="{FF2B5EF4-FFF2-40B4-BE49-F238E27FC236}">
@@ -11056,7 +9199,7 @@
         <p:spPr>
           <a:xfrm>
             <a:off x="361395" y="6488668"/>
-            <a:ext cx="2395336" cy="300210"/>
+            <a:ext cx="7620000" cy="300210"/>
           </a:xfrm>
           <a:prstGeom prst="rect">
             <a:avLst/>
@@ -11071,47 +9214,11 @@
           <a:p>
             <a:r>
               <a:rPr lang="pt-BR" sz="1351" dirty="0"/>
-              <a:t>Professor: Marcos Goulart Lima</a:t>
+              <a:t>CEA055 - Estatística e Probabilidade - Professor: Marcos Goulart Lima</a:t>
             </a:r>
           </a:p>
         </p:txBody>
       </p:sp>
-      <p:pic>
-        <p:nvPicPr>
-          <p:cNvPr id="8" name="Espaço Reservado para Conteúdo 4">
-            <a:extLst>
-              <a:ext uri="{FF2B5EF4-FFF2-40B4-BE49-F238E27FC236}">
-                <a16:creationId xmlns:a16="http://schemas.microsoft.com/office/drawing/2014/main" id="{65AB402D-D1A8-4F31-BA42-34A6F0FC69F9}"/>
-              </a:ext>
-            </a:extLst>
-          </p:cNvPr>
-          <p:cNvPicPr>
-            <a:picLocks noChangeAspect="1"/>
-          </p:cNvPicPr>
-          <p:nvPr/>
-        </p:nvPicPr>
-        <p:blipFill>
-          <a:blip r:embed="rId2">
-            <a:extLst>
-              <a:ext uri="{28A0092B-C50C-407E-A947-70E740481C1C}">
-                <a14:useLocalDpi xmlns:a14="http://schemas.microsoft.com/office/drawing/2010/main" val="0"/>
-              </a:ext>
-            </a:extLst>
-          </a:blip>
-          <a:stretch>
-            <a:fillRect/>
-          </a:stretch>
-        </p:blipFill>
-        <p:spPr>
-          <a:xfrm>
-            <a:off x="62144" y="112237"/>
-            <a:ext cx="588096" cy="1228523"/>
-          </a:xfrm>
-          <a:prstGeom prst="rect">
-            <a:avLst/>
-          </a:prstGeom>
-        </p:spPr>
-      </p:pic>
     </p:spTree>
     <p:extLst>
       <p:ext uri="{BB962C8B-B14F-4D97-AF65-F5344CB8AC3E}">
@@ -11126,219 +9233,6 @@
 </file>
 
 <file path=ppt/slides/slide6.xml><?xml version="1.0" encoding="utf-8"?>
-<p:sld xmlns:a="http://schemas.openxmlformats.org/drawingml/2006/main" xmlns:p="http://schemas.openxmlformats.org/presentationml/2006/main" xmlns:r="http://schemas.openxmlformats.org/officeDocument/2006/relationships">
-  <p:cSld>
-    <p:bg>
-      <p:bgPr>
-        <a:solidFill>
-          <a:srgbClr val="E6CCCC"/>
-        </a:solidFill>
-        <a:effectLst/>
-      </p:bgPr>
-    </p:bg>
-    <p:spTree>
-      <p:nvGrpSpPr>
-        <p:cNvPr id="1" name=""/>
-        <p:cNvGrpSpPr/>
-        <p:nvPr/>
-      </p:nvGrpSpPr>
-      <p:grpSpPr/>
-      <p:sp>
-        <p:nvSpPr>
-          <p:cNvPr id="2" name="Oval 1"/>
-          <p:cNvSpPr/>
-          <p:nvPr/>
-        </p:nvSpPr>
-        <p:spPr>
-          <a:xfrm>
-            <a:off x="5775960" y="457200"/>
-            <a:ext cx="640080" cy="640080"/>
-          </a:xfrm>
-          <a:prstGeom prst="ellipse">
-            <a:avLst/>
-          </a:prstGeom>
-          <a:solidFill>
-            <a:srgbClr val="8A3B3F"/>
-          </a:solidFill>
-          <a:ln>
-            <a:noFill/>
-          </a:ln>
-        </p:spPr>
-        <p:style>
-          <a:lnRef idx="1">
-            <a:schemeClr val="accent1"/>
-          </a:lnRef>
-          <a:fillRef idx="3">
-            <a:schemeClr val="accent1"/>
-          </a:fillRef>
-          <a:effectRef idx="2">
-            <a:schemeClr val="accent1"/>
-          </a:effectRef>
-          <a:fontRef idx="minor">
-            <a:schemeClr val="lt1"/>
-          </a:fontRef>
-        </p:style>
-        <p:txBody>
-          <a:bodyPr rtlCol="0" anchor="ctr" wrap="none"/>
-          <a:lstStyle/>
-          <a:p>
-            <a:pPr algn="ctr"/>
-            <a:r>
-              <a:rPr sz="2800" b="1">
-                <a:solidFill>
-                  <a:srgbClr val="FFFFFF"/>
-                </a:solidFill>
-              </a:rPr>
-              <a:t>!</a:t>
-            </a:r>
-          </a:p>
-        </p:txBody>
-      </p:sp>
-      <p:sp>
-        <p:nvSpPr>
-          <p:cNvPr id="3" name="TextBox 2"/>
-          <p:cNvSpPr txBox="1"/>
-          <p:nvPr/>
-        </p:nvSpPr>
-        <p:spPr>
-          <a:xfrm>
-            <a:off x="914400" y="1371600"/>
-            <a:ext cx="10363200" cy="457200"/>
-          </a:xfrm>
-          <a:prstGeom prst="rect">
-            <a:avLst/>
-          </a:prstGeom>
-          <a:noFill/>
-        </p:spPr>
-        <p:txBody>
-          <a:bodyPr wrap="square">
-            <a:spAutoFit/>
-          </a:bodyPr>
-          <a:lstStyle/>
-          <a:p>
-            <a:pPr algn="ctr"/>
-            <a:r>
-              <a:rPr sz="1800" b="1" i="0">
-                <a:solidFill>
-                  <a:srgbClr val="8A3B3F"/>
-                </a:solidFill>
-              </a:rPr>
-              <a:t>VERIFICAÇÃO RÁPIDA</a:t>
-            </a:r>
-          </a:p>
-        </p:txBody>
-      </p:sp>
-      <p:sp>
-        <p:nvSpPr>
-          <p:cNvPr id="4" name="TextBox 3"/>
-          <p:cNvSpPr txBox="1"/>
-          <p:nvPr/>
-        </p:nvSpPr>
-        <p:spPr>
-          <a:xfrm>
-            <a:off x="1188720" y="2103120"/>
-            <a:ext cx="9814560" cy="1167371"/>
-          </a:xfrm>
-          <a:prstGeom prst="rect">
-            <a:avLst/>
-          </a:prstGeom>
-          <a:noFill/>
-        </p:spPr>
-        <p:txBody>
-          <a:bodyPr wrap="square">
-            <a:spAutoFit/>
-          </a:bodyPr>
-          <a:lstStyle/>
-          <a:p>
-            <a:pPr algn="ctr"/>
-            <a:r>
-              <a:rPr sz="2800" b="1" i="0">
-                <a:solidFill>
-                  <a:srgbClr val="3D1F21"/>
-                </a:solidFill>
-              </a:rPr>
-              <a:t>"Quais são os eventos que formam a partição do espaço amostral nesse exemplo?"</a:t>
-            </a:r>
-          </a:p>
-        </p:txBody>
-      </p:sp>
-      <p:sp>
-        <p:nvSpPr>
-          <p:cNvPr id="5" name="TextBox 4"/>
-          <p:cNvSpPr txBox="1"/>
-          <p:nvPr/>
-        </p:nvSpPr>
-        <p:spPr>
-          <a:xfrm>
-            <a:off x="914400" y="5577840"/>
-            <a:ext cx="10363200" cy="457200"/>
-          </a:xfrm>
-          <a:prstGeom prst="rect">
-            <a:avLst/>
-          </a:prstGeom>
-          <a:noFill/>
-        </p:spPr>
-        <p:txBody>
-          <a:bodyPr wrap="square">
-            <a:spAutoFit/>
-          </a:bodyPr>
-          <a:lstStyle/>
-          <a:p>
-            <a:pPr algn="ctr"/>
-            <a:r>
-              <a:rPr sz="1600" b="0" i="1">
-                <a:solidFill>
-                  <a:srgbClr val="8A5C5E"/>
-                </a:solidFill>
-              </a:rPr>
-              <a:t>Sorteie um aluno antes de continuar</a:t>
-            </a:r>
-          </a:p>
-        </p:txBody>
-      </p:sp>
-      <p:sp>
-        <p:nvSpPr>
-          <p:cNvPr id="6" name="TextBox 5"/>
-          <p:cNvSpPr txBox="1"/>
-          <p:nvPr/>
-        </p:nvSpPr>
-        <p:spPr>
-          <a:xfrm>
-            <a:off x="361188" y="6463893"/>
-            <a:ext cx="7772400" cy="308152"/>
-          </a:xfrm>
-          <a:prstGeom prst="rect">
-            <a:avLst/>
-          </a:prstGeom>
-          <a:noFill/>
-        </p:spPr>
-        <p:txBody>
-          <a:bodyPr wrap="none">
-            <a:spAutoFit/>
-          </a:bodyPr>
-          <a:lstStyle/>
-          <a:p>
-            <a:pPr algn="l"/>
-            <a:r>
-              <a:rPr sz="1400" b="0" i="0">
-                <a:solidFill>
-                  <a:srgbClr val="595959"/>
-                </a:solidFill>
-              </a:rPr>
-              <a:t>CEA055 – Estatística e Probabilidade – Prof. Marcos Goulart Lima</a:t>
-            </a:r>
-          </a:p>
-        </p:txBody>
-      </p:sp>
-    </p:spTree>
-  </p:cSld>
-  <p:clrMapOvr>
-    <a:masterClrMapping/>
-  </p:clrMapOvr>
-</p:sld>
-</file>
-
-<file path=ppt/slides/slide7.xml><?xml version="1.0" encoding="utf-8"?>
 <p:sld xmlns:a="http://schemas.openxmlformats.org/drawingml/2006/main" xmlns:r="http://schemas.openxmlformats.org/officeDocument/2006/relationships" xmlns:p="http://schemas.openxmlformats.org/presentationml/2006/main">
   <p:cSld>
     <p:spTree>
@@ -11355,56 +9249,6 @@
           <a:chExt cx="0" cy="0"/>
         </a:xfrm>
       </p:grpSpPr>
-      <p:sp>
-        <p:nvSpPr>
-          <p:cNvPr id="2" name="Título 1">
-            <a:extLst>
-              <a:ext uri="{FF2B5EF4-FFF2-40B4-BE49-F238E27FC236}">
-                <a16:creationId xmlns:a16="http://schemas.microsoft.com/office/drawing/2014/main" id="{BC798918-7CB4-450A-A042-F0B538CA25DE}"/>
-              </a:ext>
-            </a:extLst>
-          </p:cNvPr>
-          <p:cNvSpPr>
-            <a:spLocks noGrp="1"/>
-          </p:cNvSpPr>
-          <p:nvPr>
-            <p:ph type="title"/>
-          </p:nvPr>
-        </p:nvSpPr>
-        <p:spPr>
-          <a:xfrm>
-            <a:off x="1032611" y="0"/>
-            <a:ext cx="10827959" cy="1574800"/>
-          </a:xfrm>
-        </p:spPr>
-        <p:txBody>
-          <a:bodyPr>
-            <a:normAutofit/>
-          </a:bodyPr>
-          <a:lstStyle/>
-          <a:p>
-            <a:pPr algn="ctr"/>
-            <a:r>
-              <a:rPr lang="pt-BR" dirty="0">
-                <a:latin typeface="AlternateGothic2 BT" panose="020B0608020202050204" pitchFamily="34" charset="0"/>
-              </a:rPr>
-              <a:t>CEA055 – Estatística e Probabilidade</a:t>
-            </a:r>
-            <a:br>
-              <a:rPr lang="pt-BR" dirty="0">
-                <a:latin typeface="AlternateGothic2 BT" panose="020B0608020202050204" pitchFamily="34" charset="0"/>
-              </a:rPr>
-            </a:br>
-            <a:r>
-              <a:rPr lang="pt-BR" sz="2200" b="1" dirty="0"/>
-              <a:t>Probabilidade Total e Bayes</a:t>
-            </a:r>
-            <a:endParaRPr lang="pt-BR" dirty="0">
-              <a:latin typeface="AlternateGothic2 BT" panose="020B0608020202050204" pitchFamily="34" charset="0"/>
-            </a:endParaRPr>
-          </a:p>
-        </p:txBody>
-      </p:sp>
       <p:sp>
         <p:nvSpPr>
           <p:cNvPr id="6" name="CaixaDeTexto 5">
@@ -11523,7 +9367,7 @@
         <p:spPr>
           <a:xfrm>
             <a:off x="361395" y="6488668"/>
-            <a:ext cx="2395336" cy="300210"/>
+            <a:ext cx="7620000" cy="300210"/>
           </a:xfrm>
           <a:prstGeom prst="rect">
             <a:avLst/>
@@ -11538,51 +9382,210 @@
           <a:p>
             <a:r>
               <a:rPr lang="pt-BR" sz="1351" dirty="0"/>
-              <a:t>Professor: Marcos Goulart Lima</a:t>
+              <a:t>CEA055 - Estatística e Probabilidade - Professor: Marcos Goulart Lima</a:t>
             </a:r>
           </a:p>
         </p:txBody>
       </p:sp>
-      <p:pic>
-        <p:nvPicPr>
-          <p:cNvPr id="8" name="Espaço Reservado para Conteúdo 4">
+    </p:spTree>
+    <p:extLst>
+      <p:ext uri="{BB962C8B-B14F-4D97-AF65-F5344CB8AC3E}">
+        <p14:creationId xmlns:p14="http://schemas.microsoft.com/office/powerpoint/2010/main" val="2987801920"/>
+      </p:ext>
+    </p:extLst>
+  </p:cSld>
+  <p:clrMapOvr>
+    <a:masterClrMapping/>
+  </p:clrMapOvr>
+</p:sld>
+</file>
+
+<file path=ppt/slides/slide7.xml><?xml version="1.0" encoding="utf-8"?>
+<p:sld xmlns:a="http://schemas.openxmlformats.org/drawingml/2006/main" xmlns:r="http://schemas.openxmlformats.org/officeDocument/2006/relationships" xmlns:p="http://schemas.openxmlformats.org/presentationml/2006/main">
+  <p:cSld>
+    <p:spTree>
+      <p:nvGrpSpPr>
+        <p:cNvPr id="1" name=""/>
+        <p:cNvGrpSpPr/>
+        <p:nvPr/>
+      </p:nvGrpSpPr>
+      <p:grpSpPr>
+        <a:xfrm>
+          <a:off x="0" y="0"/>
+          <a:ext cx="0" cy="0"/>
+          <a:chOff x="0" y="0"/>
+          <a:chExt cx="0" cy="0"/>
+        </a:xfrm>
+      </p:grpSpPr>
+      <p:sp>
+        <p:nvSpPr>
+          <p:cNvPr id="6" name="CaixaDeTexto 5">
             <a:extLst>
               <a:ext uri="{FF2B5EF4-FFF2-40B4-BE49-F238E27FC236}">
-                <a16:creationId xmlns:a16="http://schemas.microsoft.com/office/drawing/2014/main" id="{65AB402D-D1A8-4F31-BA42-34A6F0FC69F9}"/>
+                <a16:creationId xmlns:a16="http://schemas.microsoft.com/office/drawing/2014/main" id="{720B10DA-C761-4DEE-8D86-E170E1C2E981}"/>
               </a:ext>
             </a:extLst>
           </p:cNvPr>
-          <p:cNvPicPr>
-            <a:picLocks noChangeAspect="1"/>
-          </p:cNvPicPr>
+          <p:cNvSpPr txBox="1"/>
           <p:nvPr/>
-        </p:nvPicPr>
-        <p:blipFill>
-          <a:blip r:embed="rId2">
-            <a:extLst>
-              <a:ext uri="{28A0092B-C50C-407E-A947-70E740481C1C}">
-                <a14:useLocalDpi xmlns:a14="http://schemas.microsoft.com/office/drawing/2010/main" val="0"/>
-              </a:ext>
-            </a:extLst>
-          </a:blip>
-          <a:stretch>
-            <a:fillRect/>
-          </a:stretch>
-        </p:blipFill>
+        </p:nvSpPr>
         <p:spPr>
           <a:xfrm>
-            <a:off x="62144" y="112237"/>
-            <a:ext cx="588096" cy="1228523"/>
+            <a:off x="881687" y="1506234"/>
+            <a:ext cx="10748061" cy="5021055"/>
           </a:xfrm>
           <a:prstGeom prst="rect">
             <a:avLst/>
           </a:prstGeom>
+          <a:noFill/>
         </p:spPr>
-      </p:pic>
+        <p:txBody>
+          <a:bodyPr wrap="square" rtlCol="0">
+            <a:spAutoFit/>
+          </a:bodyPr>
+          <a:lstStyle/>
+          <a:p>
+            <a:pPr rtl="0">
+              <a:lnSpc>
+                <a:spcPct val="150000"/>
+              </a:lnSpc>
+            </a:pPr>
+            <a:r>
+              <a:rPr lang="pt-BR" sz="2400" b="1" dirty="0"/>
+              <a:t>Exemplo. </a:t>
+            </a:r>
+            <a:r>
+              <a:rPr lang="pt-BR" sz="2400" dirty="0"/>
+              <a:t>Num torneio de Mario Kart, 60% dos jogadores escolhem um kart leve e 40% escolhem um kart pesado. A taxa de vitória numa corrida é de 30% para quem usa kart leve e 55% para quem usa kart pesado. Escolhendo um jogador ao acaso, qual a probabilidade de ele vencer a corrida?</a:t>
+            </a:r>
+          </a:p>
+          <a:p>
+            <a:pPr rtl="0">
+              <a:lnSpc>
+                <a:spcPct val="150000"/>
+              </a:lnSpc>
+            </a:pPr>
+            <a:endParaRPr lang="pt-BR" sz="2400" dirty="0"/>
+          </a:p>
+          <a:p>
+            <a:pPr rtl="0">
+              <a:lnSpc>
+                <a:spcPct val="150000"/>
+              </a:lnSpc>
+            </a:pPr>
+            <a:r>
+              <a:rPr lang="pt-BR" sz="2400" b="1" dirty="0"/>
+              <a:t>Resolução: </a:t>
+            </a:r>
+            <a:r>
+              <a:rPr lang="pt-BR" sz="2400" dirty="0"/>
+              <a:t>P(leve) = 0,6, P(pesado) = 0,4. </a:t>
+            </a:r>
+          </a:p>
+          <a:p>
+            <a:pPr rtl="0">
+              <a:lnSpc>
+                <a:spcPct val="150000"/>
+              </a:lnSpc>
+            </a:pPr>
+            <a:r>
+              <a:rPr lang="pt-BR" sz="2400" dirty="0"/>
+              <a:t>P(</a:t>
+            </a:r>
+            <a:r>
+              <a:rPr lang="pt-BR" sz="2400" dirty="0" err="1"/>
+              <a:t>vitória|leve</a:t>
+            </a:r>
+            <a:r>
+              <a:rPr lang="pt-BR" sz="2400" dirty="0"/>
+              <a:t>) = 0,3, P(</a:t>
+            </a:r>
+            <a:r>
+              <a:rPr lang="pt-BR" sz="2400" dirty="0" err="1"/>
+              <a:t>vitória|pesado</a:t>
+            </a:r>
+            <a:r>
+              <a:rPr lang="pt-BR" sz="2400" dirty="0"/>
+              <a:t>) = 0,55. </a:t>
+            </a:r>
+          </a:p>
+          <a:p>
+            <a:pPr rtl="0">
+              <a:lnSpc>
+                <a:spcPct val="150000"/>
+              </a:lnSpc>
+            </a:pPr>
+            <a:r>
+              <a:rPr lang="pt-BR" sz="2400" dirty="0"/>
+              <a:t>P(vitória) = P(leve)·P(</a:t>
+            </a:r>
+            <a:r>
+              <a:rPr lang="pt-BR" sz="2400" dirty="0" err="1"/>
+              <a:t>vitória|leve</a:t>
+            </a:r>
+            <a:r>
+              <a:rPr lang="pt-BR" sz="2400" dirty="0"/>
+              <a:t>) + P(pesado)·P(</a:t>
+            </a:r>
+            <a:r>
+              <a:rPr lang="pt-BR" sz="2400" dirty="0" err="1"/>
+              <a:t>vitória|pesado</a:t>
+            </a:r>
+            <a:r>
+              <a:rPr lang="pt-BR" sz="2400" dirty="0"/>
+              <a:t>) = 0,6·0,3 + 0,4·0,55 = 0,18 + 0,22 = </a:t>
+            </a:r>
+            <a:r>
+              <a:rPr lang="pt-BR" sz="2400" b="1" dirty="0"/>
+              <a:t>0,40</a:t>
+            </a:r>
+            <a:r>
+              <a:rPr lang="pt-BR" sz="2400" dirty="0"/>
+              <a:t>.</a:t>
+            </a:r>
+            <a:endParaRPr lang="pt-BR" sz="2800" dirty="0"/>
+          </a:p>
+        </p:txBody>
+      </p:sp>
+      <p:sp>
+        <p:nvSpPr>
+          <p:cNvPr id="3" name="CaixaDeTexto 2">
+            <a:extLst>
+              <a:ext uri="{FF2B5EF4-FFF2-40B4-BE49-F238E27FC236}">
+                <a16:creationId xmlns:a16="http://schemas.microsoft.com/office/drawing/2014/main" id="{19131A04-B5D6-4211-8B49-4615DE5797E9}"/>
+              </a:ext>
+            </a:extLst>
+          </p:cNvPr>
+          <p:cNvSpPr txBox="1"/>
+          <p:nvPr/>
+        </p:nvSpPr>
+        <p:spPr>
+          <a:xfrm>
+            <a:off x="361395" y="6488668"/>
+            <a:ext cx="7620000" cy="300210"/>
+          </a:xfrm>
+          <a:prstGeom prst="rect">
+            <a:avLst/>
+          </a:prstGeom>
+          <a:noFill/>
+        </p:spPr>
+        <p:txBody>
+          <a:bodyPr wrap="none" rtlCol="0">
+            <a:spAutoFit/>
+          </a:bodyPr>
+          <a:lstStyle/>
+          <a:p>
+            <a:r>
+              <a:rPr lang="pt-BR" sz="1351" dirty="0"/>
+              <a:t>CEA055 - Estatística e Probabilidade - Professor: Marcos Goulart Lima</a:t>
+            </a:r>
+          </a:p>
+        </p:txBody>
+      </p:sp>
     </p:spTree>
     <p:extLst>
       <p:ext uri="{BB962C8B-B14F-4D97-AF65-F5344CB8AC3E}">
-        <p14:creationId xmlns:p14="http://schemas.microsoft.com/office/powerpoint/2010/main" val="2987801920"/>
+        <p14:creationId xmlns:p14="http://schemas.microsoft.com/office/powerpoint/2010/main" val="1473020006"/>
       </p:ext>
     </p:extLst>
   </p:cSld>
@@ -11611,56 +9614,6 @@
       </p:grpSpPr>
       <p:sp>
         <p:nvSpPr>
-          <p:cNvPr id="2" name="Título 1">
-            <a:extLst>
-              <a:ext uri="{FF2B5EF4-FFF2-40B4-BE49-F238E27FC236}">
-                <a16:creationId xmlns:a16="http://schemas.microsoft.com/office/drawing/2014/main" id="{BC798918-7CB4-450A-A042-F0B538CA25DE}"/>
-              </a:ext>
-            </a:extLst>
-          </p:cNvPr>
-          <p:cNvSpPr>
-            <a:spLocks noGrp="1"/>
-          </p:cNvSpPr>
-          <p:nvPr>
-            <p:ph type="title"/>
-          </p:nvPr>
-        </p:nvSpPr>
-        <p:spPr>
-          <a:xfrm>
-            <a:off x="1032611" y="0"/>
-            <a:ext cx="10827959" cy="1574800"/>
-          </a:xfrm>
-        </p:spPr>
-        <p:txBody>
-          <a:bodyPr>
-            <a:normAutofit/>
-          </a:bodyPr>
-          <a:lstStyle/>
-          <a:p>
-            <a:pPr algn="ctr"/>
-            <a:r>
-              <a:rPr lang="pt-BR" dirty="0">
-                <a:latin typeface="AlternateGothic2 BT" panose="020B0608020202050204" pitchFamily="34" charset="0"/>
-              </a:rPr>
-              <a:t>CEA055 – Estatística e Probabilidade</a:t>
-            </a:r>
-            <a:br>
-              <a:rPr lang="pt-BR" dirty="0">
-                <a:latin typeface="AlternateGothic2 BT" panose="020B0608020202050204" pitchFamily="34" charset="0"/>
-              </a:rPr>
-            </a:br>
-            <a:r>
-              <a:rPr lang="pt-BR" sz="2200" b="1" dirty="0"/>
-              <a:t>Probabilidade Total e Bayes</a:t>
-            </a:r>
-            <a:endParaRPr lang="pt-BR" dirty="0">
-              <a:latin typeface="AlternateGothic2 BT" panose="020B0608020202050204" pitchFamily="34" charset="0"/>
-            </a:endParaRPr>
-          </a:p>
-        </p:txBody>
-      </p:sp>
-      <p:sp>
-        <p:nvSpPr>
           <p:cNvPr id="6" name="CaixaDeTexto 5">
             <a:extLst>
               <a:ext uri="{FF2B5EF4-FFF2-40B4-BE49-F238E27FC236}">
@@ -11674,7 +9627,7 @@
         <p:spPr>
           <a:xfrm>
             <a:off x="881687" y="1506234"/>
-            <a:ext cx="10748061" cy="5021055"/>
+            <a:ext cx="10748061" cy="4832092"/>
           </a:xfrm>
           <a:prstGeom prst="rect">
             <a:avLst/>
@@ -11687,104 +9640,99 @@
           </a:bodyPr>
           <a:lstStyle/>
           <a:p>
-            <a:pPr rtl="0">
+            <a:r>
+              <a:rPr lang="pt-BR" sz="2800" b="1" dirty="0"/>
+              <a:t>Teorema de </a:t>
+            </a:r>
+            <a:r>
+              <a:rPr lang="pt-BR" sz="2800" b="1" dirty="0" err="1"/>
+              <a:t>Bayes</a:t>
+            </a:r>
+            <a:r>
+              <a:rPr lang="pt-BR" sz="2800" b="1" dirty="0"/>
+              <a:t> </a:t>
+            </a:r>
+          </a:p>
+          <a:p>
+            <a:pPr>
               <a:lnSpc>
                 <a:spcPct val="150000"/>
               </a:lnSpc>
             </a:pPr>
             <a:r>
-              <a:rPr lang="pt-BR" sz="2400" b="1" dirty="0"/>
-              <a:t>Exemplo. </a:t>
-            </a:r>
-            <a:r>
-              <a:rPr lang="pt-BR" sz="2400" dirty="0"/>
-              <a:t>Num torneio de Mario Kart, 60% dos jogadores escolhem um kart leve e 40% escolhem um kart pesado. A taxa de vitória numa corrida é de 30% para quem usa kart leve e 55% para quem usa kart pesado. Escolhendo um jogador ao acaso, qual a probabilidade de ele vencer a corrida?</a:t>
-            </a:r>
-          </a:p>
-          <a:p>
-            <a:pPr rtl="0">
+              <a:rPr lang="pt-BR" sz="2400" b="0" dirty="0"/>
+              <a:t>O Teorema de </a:t>
+            </a:r>
+            <a:r>
+              <a:rPr lang="pt-BR" sz="2400" b="0" dirty="0" err="1"/>
+              <a:t>Bayes</a:t>
+            </a:r>
+            <a:r>
+              <a:rPr lang="pt-BR" sz="2400" b="0" dirty="0"/>
+              <a:t> serve para inverter uma probabilidade condicional: a partir de P(</a:t>
+            </a:r>
+            <a:r>
+              <a:rPr lang="pt-BR" sz="2400" b="0" dirty="0" err="1"/>
+              <a:t>efeito|causa</a:t>
+            </a:r>
+            <a:r>
+              <a:rPr lang="pt-BR" sz="2400" b="0" dirty="0"/>
+              <a:t>), ele calcula P(causa | efeito). </a:t>
+            </a:r>
+          </a:p>
+          <a:p>
+            <a:pPr>
               <a:lnSpc>
                 <a:spcPct val="150000"/>
               </a:lnSpc>
             </a:pPr>
+            <a:r>
+              <a:rPr lang="pt-BR" sz="2400" b="0" dirty="0"/>
+              <a:t>É exatamente o problema do "Detector de mentiras" da Aula 5 — sabíamos que o teste falha com probabilidade 0,8 quando a pessoa é ladrão </a:t>
+            </a:r>
+            <a:r>
+              <a:rPr lang="pt-BR" sz="2400" b="1" dirty="0"/>
+              <a:t>(P(</a:t>
+            </a:r>
+            <a:r>
+              <a:rPr lang="pt-BR" sz="2400" b="1" dirty="0" err="1"/>
+              <a:t>falhou|ladrão</a:t>
+            </a:r>
+            <a:r>
+              <a:rPr lang="pt-BR" sz="2400" b="1" dirty="0"/>
+              <a:t>) = 0,8)</a:t>
+            </a:r>
+            <a:r>
+              <a:rPr lang="pt-BR" sz="2400" b="0" dirty="0"/>
+              <a:t>, mas a pergunta que interessava de verdade era a contrária: de quem falhou no teste, qual a probabilidade de ser realmente ladrão? </a:t>
+            </a:r>
+            <a:r>
+              <a:rPr lang="pt-BR" sz="2400" b="1" dirty="0"/>
+              <a:t>(P(</a:t>
+            </a:r>
+            <a:r>
+              <a:rPr lang="pt-BR" sz="2400" b="1" dirty="0" err="1"/>
+              <a:t>ladrão|falhou</a:t>
+            </a:r>
+            <a:r>
+              <a:rPr lang="pt-BR" sz="2400" b="1" dirty="0"/>
+              <a:t>) = 0,31).</a:t>
+            </a:r>
+            <a:r>
+              <a:rPr lang="pt-BR" sz="2400" b="0" dirty="0"/>
+              <a:t> O Teorema de </a:t>
+            </a:r>
+            <a:r>
+              <a:rPr lang="pt-BR" sz="2400" b="0" dirty="0" err="1"/>
+              <a:t>Bayes</a:t>
+            </a:r>
+            <a:r>
+              <a:rPr lang="pt-BR" sz="2400" b="0" dirty="0"/>
+              <a:t> formaliza essa inversão.</a:t>
+            </a:r>
             <a:endParaRPr lang="pt-BR" sz="2400" dirty="0"/>
           </a:p>
           <a:p>
-            <a:pPr rtl="0">
-              <a:lnSpc>
-                <a:spcPct val="150000"/>
-              </a:lnSpc>
-            </a:pPr>
-            <a:r>
-              <a:rPr lang="pt-BR" sz="2400" b="1" dirty="0"/>
-              <a:t>Resolução: </a:t>
-            </a:r>
-            <a:r>
-              <a:rPr lang="pt-BR" sz="2400" dirty="0"/>
-              <a:t>P(leve) = 0,6, P(pesado) = 0,4. </a:t>
-            </a:r>
-          </a:p>
-          <a:p>
-            <a:pPr rtl="0">
-              <a:lnSpc>
-                <a:spcPct val="150000"/>
-              </a:lnSpc>
-            </a:pPr>
-            <a:r>
-              <a:rPr lang="pt-BR" sz="2400" dirty="0"/>
-              <a:t>P(</a:t>
-            </a:r>
-            <a:r>
-              <a:rPr lang="pt-BR" sz="2400" dirty="0" err="1"/>
-              <a:t>vitória|leve</a:t>
-            </a:r>
-            <a:r>
-              <a:rPr lang="pt-BR" sz="2400" dirty="0"/>
-              <a:t>) = 0,3, P(</a:t>
-            </a:r>
-            <a:r>
-              <a:rPr lang="pt-BR" sz="2400" dirty="0" err="1"/>
-              <a:t>vitória|pesado</a:t>
-            </a:r>
-            <a:r>
-              <a:rPr lang="pt-BR" sz="2400" dirty="0"/>
-              <a:t>) = 0,55. </a:t>
-            </a:r>
-          </a:p>
-          <a:p>
-            <a:pPr rtl="0">
-              <a:lnSpc>
-                <a:spcPct val="150000"/>
-              </a:lnSpc>
-            </a:pPr>
-            <a:r>
-              <a:rPr lang="pt-BR" sz="2400" dirty="0"/>
-              <a:t>P(vitória) = P(leve)·P(</a:t>
-            </a:r>
-            <a:r>
-              <a:rPr lang="pt-BR" sz="2400" dirty="0" err="1"/>
-              <a:t>vitória|leve</a:t>
-            </a:r>
-            <a:r>
-              <a:rPr lang="pt-BR" sz="2400" dirty="0"/>
-              <a:t>) + P(pesado)·P(</a:t>
-            </a:r>
-            <a:r>
-              <a:rPr lang="pt-BR" sz="2400" dirty="0" err="1"/>
-              <a:t>vitória|pesado</a:t>
-            </a:r>
-            <a:r>
-              <a:rPr lang="pt-BR" sz="2400" dirty="0"/>
-              <a:t>) = 0,6·0,3 + 0,4·0,55 = 0,18 + 0,22 = </a:t>
-            </a:r>
-            <a:r>
-              <a:rPr lang="pt-BR" sz="2400" b="1" dirty="0"/>
-              <a:t>0,40</a:t>
-            </a:r>
-            <a:r>
-              <a:rPr lang="pt-BR" sz="2400" dirty="0"/>
-              <a:t>.</a:t>
-            </a:r>
             <a:endParaRPr lang="pt-BR" sz="2800" dirty="0"/>
           </a:p>
         </p:txBody>
@@ -11804,7 +9752,7 @@
         <p:spPr>
           <a:xfrm>
             <a:off x="361395" y="6488668"/>
-            <a:ext cx="2395336" cy="300210"/>
+            <a:ext cx="7620000" cy="300210"/>
           </a:xfrm>
           <a:prstGeom prst="rect">
             <a:avLst/>
@@ -11819,51 +9767,15 @@
           <a:p>
             <a:r>
               <a:rPr lang="pt-BR" sz="1351" dirty="0"/>
-              <a:t>Professor: Marcos Goulart Lima</a:t>
+              <a:t>CEA055 - Estatística e Probabilidade - Professor: Marcos Goulart Lima</a:t>
             </a:r>
           </a:p>
         </p:txBody>
       </p:sp>
-      <p:pic>
-        <p:nvPicPr>
-          <p:cNvPr id="8" name="Espaço Reservado para Conteúdo 4">
-            <a:extLst>
-              <a:ext uri="{FF2B5EF4-FFF2-40B4-BE49-F238E27FC236}">
-                <a16:creationId xmlns:a16="http://schemas.microsoft.com/office/drawing/2014/main" id="{65AB402D-D1A8-4F31-BA42-34A6F0FC69F9}"/>
-              </a:ext>
-            </a:extLst>
-          </p:cNvPr>
-          <p:cNvPicPr>
-            <a:picLocks noChangeAspect="1"/>
-          </p:cNvPicPr>
-          <p:nvPr/>
-        </p:nvPicPr>
-        <p:blipFill>
-          <a:blip r:embed="rId2">
-            <a:extLst>
-              <a:ext uri="{28A0092B-C50C-407E-A947-70E740481C1C}">
-                <a14:useLocalDpi xmlns:a14="http://schemas.microsoft.com/office/drawing/2010/main" val="0"/>
-              </a:ext>
-            </a:extLst>
-          </a:blip>
-          <a:stretch>
-            <a:fillRect/>
-          </a:stretch>
-        </p:blipFill>
-        <p:spPr>
-          <a:xfrm>
-            <a:off x="62144" y="112237"/>
-            <a:ext cx="588096" cy="1228523"/>
-          </a:xfrm>
-          <a:prstGeom prst="rect">
-            <a:avLst/>
-          </a:prstGeom>
-        </p:spPr>
-      </p:pic>
     </p:spTree>
     <p:extLst>
       <p:ext uri="{BB962C8B-B14F-4D97-AF65-F5344CB8AC3E}">
-        <p14:creationId xmlns:p14="http://schemas.microsoft.com/office/powerpoint/2010/main" val="1473020006"/>
+        <p14:creationId xmlns:p14="http://schemas.microsoft.com/office/powerpoint/2010/main" val="191540384"/>
       </p:ext>
     </p:extLst>
   </p:cSld>
@@ -11892,56 +9804,6 @@
       </p:grpSpPr>
       <p:sp>
         <p:nvSpPr>
-          <p:cNvPr id="2" name="Título 1">
-            <a:extLst>
-              <a:ext uri="{FF2B5EF4-FFF2-40B4-BE49-F238E27FC236}">
-                <a16:creationId xmlns:a16="http://schemas.microsoft.com/office/drawing/2014/main" id="{BC798918-7CB4-450A-A042-F0B538CA25DE}"/>
-              </a:ext>
-            </a:extLst>
-          </p:cNvPr>
-          <p:cNvSpPr>
-            <a:spLocks noGrp="1"/>
-          </p:cNvSpPr>
-          <p:nvPr>
-            <p:ph type="title"/>
-          </p:nvPr>
-        </p:nvSpPr>
-        <p:spPr>
-          <a:xfrm>
-            <a:off x="1032611" y="0"/>
-            <a:ext cx="10827959" cy="1574800"/>
-          </a:xfrm>
-        </p:spPr>
-        <p:txBody>
-          <a:bodyPr>
-            <a:normAutofit/>
-          </a:bodyPr>
-          <a:lstStyle/>
-          <a:p>
-            <a:pPr algn="ctr"/>
-            <a:r>
-              <a:rPr lang="pt-BR" dirty="0">
-                <a:latin typeface="AlternateGothic2 BT" panose="020B0608020202050204" pitchFamily="34" charset="0"/>
-              </a:rPr>
-              <a:t>CEA055 – Estatística e Probabilidade</a:t>
-            </a:r>
-            <a:br>
-              <a:rPr lang="pt-BR" dirty="0">
-                <a:latin typeface="AlternateGothic2 BT" panose="020B0608020202050204" pitchFamily="34" charset="0"/>
-              </a:rPr>
-            </a:br>
-            <a:r>
-              <a:rPr lang="pt-BR" sz="2200" b="1" dirty="0"/>
-              <a:t>Probabilidade Total e Bayes</a:t>
-            </a:r>
-            <a:endParaRPr lang="pt-BR" dirty="0">
-              <a:latin typeface="AlternateGothic2 BT" panose="020B0608020202050204" pitchFamily="34" charset="0"/>
-            </a:endParaRPr>
-          </a:p>
-        </p:txBody>
-      </p:sp>
-      <p:sp>
-        <p:nvSpPr>
           <p:cNvPr id="6" name="CaixaDeTexto 5">
             <a:extLst>
               <a:ext uri="{FF2B5EF4-FFF2-40B4-BE49-F238E27FC236}">
@@ -11955,7 +9817,7 @@
         <p:spPr>
           <a:xfrm>
             <a:off x="881687" y="1506234"/>
-            <a:ext cx="10748061" cy="4832092"/>
+            <a:ext cx="10748061" cy="3359061"/>
           </a:xfrm>
           <a:prstGeom prst="rect">
             <a:avLst/>
@@ -11968,44 +9830,26 @@
           </a:bodyPr>
           <a:lstStyle/>
           <a:p>
-            <a:r>
-              <a:rPr lang="pt-BR" sz="2800" b="1" dirty="0"/>
-              <a:t>Teorema de </a:t>
-            </a:r>
-            <a:r>
-              <a:rPr lang="pt-BR" sz="2800" b="1" dirty="0" err="1"/>
-              <a:t>Bayes</a:t>
-            </a:r>
-            <a:r>
-              <a:rPr lang="pt-BR" sz="2800" b="1" dirty="0"/>
-              <a:t> </a:t>
-            </a:r>
-          </a:p>
-          <a:p>
             <a:pPr>
               <a:lnSpc>
                 <a:spcPct val="150000"/>
               </a:lnSpc>
             </a:pPr>
             <a:r>
-              <a:rPr lang="pt-BR" sz="2400" b="0" dirty="0"/>
-              <a:t>O Teorema de </a:t>
-            </a:r>
-            <a:r>
-              <a:rPr lang="pt-BR" sz="2400" b="0" dirty="0" err="1"/>
-              <a:t>Bayes</a:t>
-            </a:r>
-            <a:r>
-              <a:rPr lang="pt-BR" sz="2400" b="0" dirty="0"/>
-              <a:t> serve para inverter uma probabilidade condicional: a partir de P(</a:t>
-            </a:r>
-            <a:r>
-              <a:rPr lang="pt-BR" sz="2400" b="0" dirty="0" err="1"/>
-              <a:t>efeito|causa</a:t>
-            </a:r>
-            <a:r>
-              <a:rPr lang="pt-BR" sz="2400" b="0" dirty="0"/>
-              <a:t>), ele calcula P(causa | efeito). </a:t>
+              <a:rPr lang="pt-BR" sz="2400" b="1" dirty="0"/>
+              <a:t>Exemplo 5.15. </a:t>
+            </a:r>
+            <a:r>
+              <a:rPr lang="pt-BR" sz="2400" dirty="0"/>
+              <a:t>(Bussab &amp; </a:t>
+            </a:r>
+            <a:r>
+              <a:rPr lang="pt-BR" sz="2400" dirty="0" err="1"/>
+              <a:t>Morettin</a:t>
+            </a:r>
+            <a:r>
+              <a:rPr lang="pt-BR" sz="2400" dirty="0"/>
+              <a:t>) Numa empresa, candidatos fazem um curso de treinamento e são classificados como Bons (25%), Médios (50%) ou Fracos (25%). Um teste alternativo, aplicado antes do curso, tem taxa de aprovação de 80% para quem seria Bom, 50% para Médio e 20% para Fraco. </a:t>
             </a:r>
           </a:p>
           <a:p>
@@ -12014,54 +9858,18 @@
                 <a:spcPct val="150000"/>
               </a:lnSpc>
             </a:pPr>
-            <a:r>
-              <a:rPr lang="pt-BR" sz="2400" b="0" dirty="0"/>
-              <a:t>É exatamente o problema do "Detector de mentiras" da Aula 5 — sabíamos que o teste falha com probabilidade 0,8 quando a pessoa é ladrão </a:t>
-            </a:r>
-            <a:r>
-              <a:rPr lang="pt-BR" sz="2400" b="1" dirty="0"/>
-              <a:t>(P(</a:t>
-            </a:r>
-            <a:r>
-              <a:rPr lang="pt-BR" sz="2400" b="1" dirty="0" err="1"/>
-              <a:t>falhou|ladrão</a:t>
-            </a:r>
-            <a:r>
-              <a:rPr lang="pt-BR" sz="2400" b="1" dirty="0"/>
-              <a:t>) = 0,8)</a:t>
-            </a:r>
-            <a:r>
-              <a:rPr lang="pt-BR" sz="2400" b="0" dirty="0"/>
-              <a:t>, mas a pergunta que interessava de verdade era a contrária: de quem falhou no teste, qual a probabilidade de ser realmente ladrão? </a:t>
-            </a:r>
-            <a:r>
-              <a:rPr lang="pt-BR" sz="2400" b="1" dirty="0"/>
-              <a:t>(P(</a:t>
-            </a:r>
-            <a:r>
-              <a:rPr lang="pt-BR" sz="2400" b="1" dirty="0" err="1"/>
-              <a:t>ladrão|falhou</a:t>
-            </a:r>
-            <a:r>
-              <a:rPr lang="pt-BR" sz="2400" b="1" dirty="0"/>
-              <a:t>) = 0,31).</a:t>
-            </a:r>
-            <a:r>
-              <a:rPr lang="pt-BR" sz="2400" b="0" dirty="0"/>
-              <a:t> O Teorema de </a:t>
-            </a:r>
-            <a:r>
-              <a:rPr lang="pt-BR" sz="2400" b="0" dirty="0" err="1"/>
-              <a:t>Bayes</a:t>
-            </a:r>
-            <a:r>
-              <a:rPr lang="pt-BR" sz="2400" b="0" dirty="0"/>
-              <a:t> formaliza essa inversão.</a:t>
-            </a:r>
             <a:endParaRPr lang="pt-BR" sz="2400" dirty="0"/>
           </a:p>
           <a:p>
-            <a:endParaRPr lang="pt-BR" sz="2800" dirty="0"/>
+            <a:pPr>
+              <a:lnSpc>
+                <a:spcPct val="150000"/>
+              </a:lnSpc>
+            </a:pPr>
+            <a:r>
+              <a:rPr lang="pt-BR" sz="2400" dirty="0"/>
+              <a:t>Qual a probabilidade de um candidato aprovado no teste ser, na verdade, Fraco?</a:t>
+            </a:r>
           </a:p>
         </p:txBody>
       </p:sp>
@@ -12080,7 +9888,7 @@
         <p:spPr>
           <a:xfrm>
             <a:off x="361395" y="6488668"/>
-            <a:ext cx="2395336" cy="300210"/>
+            <a:ext cx="7620000" cy="300210"/>
           </a:xfrm>
           <a:prstGeom prst="rect">
             <a:avLst/>
@@ -12095,51 +9903,15 @@
           <a:p>
             <a:r>
               <a:rPr lang="pt-BR" sz="1351" dirty="0"/>
-              <a:t>Professor: Marcos Goulart Lima</a:t>
+              <a:t>CEA055 - Estatística e Probabilidade - Professor: Marcos Goulart Lima</a:t>
             </a:r>
           </a:p>
         </p:txBody>
       </p:sp>
-      <p:pic>
-        <p:nvPicPr>
-          <p:cNvPr id="8" name="Espaço Reservado para Conteúdo 4">
-            <a:extLst>
-              <a:ext uri="{FF2B5EF4-FFF2-40B4-BE49-F238E27FC236}">
-                <a16:creationId xmlns:a16="http://schemas.microsoft.com/office/drawing/2014/main" id="{65AB402D-D1A8-4F31-BA42-34A6F0FC69F9}"/>
-              </a:ext>
-            </a:extLst>
-          </p:cNvPr>
-          <p:cNvPicPr>
-            <a:picLocks noChangeAspect="1"/>
-          </p:cNvPicPr>
-          <p:nvPr/>
-        </p:nvPicPr>
-        <p:blipFill>
-          <a:blip r:embed="rId2">
-            <a:extLst>
-              <a:ext uri="{28A0092B-C50C-407E-A947-70E740481C1C}">
-                <a14:useLocalDpi xmlns:a14="http://schemas.microsoft.com/office/drawing/2010/main" val="0"/>
-              </a:ext>
-            </a:extLst>
-          </a:blip>
-          <a:stretch>
-            <a:fillRect/>
-          </a:stretch>
-        </p:blipFill>
-        <p:spPr>
-          <a:xfrm>
-            <a:off x="62144" y="112237"/>
-            <a:ext cx="588096" cy="1228523"/>
-          </a:xfrm>
-          <a:prstGeom prst="rect">
-            <a:avLst/>
-          </a:prstGeom>
-        </p:spPr>
-      </p:pic>
     </p:spTree>
     <p:extLst>
       <p:ext uri="{BB962C8B-B14F-4D97-AF65-F5344CB8AC3E}">
-        <p14:creationId xmlns:p14="http://schemas.microsoft.com/office/powerpoint/2010/main" val="191540384"/>
+        <p14:creationId xmlns:p14="http://schemas.microsoft.com/office/powerpoint/2010/main" val="3958118887"/>
       </p:ext>
     </p:extLst>
   </p:cSld>

--- a/docs/2026-2/cea055-estatistica-probabilidade/06-probabilidade-total-bayes/arquivos/Aula_06_Probabilidade_Total_Bayes_SITE.pptx
+++ b/docs/2026-2/cea055-estatistica-probabilidade/06-probabilidade-total-bayes/arquivos/Aula_06_Probabilidade_Total_Bayes_SITE.pptx
@@ -3900,15 +3900,23 @@
             </a:pPr>
             <a:r>
               <a:rPr lang="pt-BR" sz="2200" dirty="0"/>
-              <a:t>Montgomery, Runger. </a:t>
-            </a:r>
-            <a:r>
-              <a:rPr lang="pt-BR" sz="2200" b="1" dirty="0"/>
-              <a:t>Applied Statistics and Probability for Engineers</a:t>
+              <a:t>Montgomery, Runger</a:t>
+            </a:r>
+            <a:r>
+              <a:rPr lang="pt-BR" sz="2200"/>
+              <a:t>. </a:t>
+            </a:r>
+            <a:r>
+              <a:rPr lang="pt-BR" sz="2200" b="1"/>
+              <a:t>Estatística Aplicada e Probabilidade para Engenheiros</a:t>
+            </a:r>
+            <a:r>
+              <a:rPr lang="pt-BR" sz="2200"/>
+              <a:t>, 7ª ed. — </a:t>
             </a:r>
             <a:r>
               <a:rPr lang="pt-BR" sz="2200" dirty="0"/>
-              <a:t>, 7th ed — Cap. 2 (2.6, 2.8)</a:t>
+              <a:t>Cap. 2 (2.6, 2.8)</a:t>
             </a:r>
           </a:p>
           <a:p>
@@ -4311,13 +4319,73 @@
                       <a:rPr lang="pt-BR" sz="2400" i="1" dirty="0" smtClean="0">
                         <a:latin typeface="Cambria Math" panose="02040503050406030204" pitchFamily="18" charset="0"/>
                       </a:rPr>
-                      <m:t>=0,05/0,50=</m:t>
+                      <m:t>=</m:t>
+                    </m:r>
+                    <m:r>
+                      <a:rPr lang="pt-BR" sz="2400" i="1" dirty="0" smtClean="0">
+                        <a:latin typeface="Cambria Math" panose="02040503050406030204" pitchFamily="18" charset="0"/>
+                      </a:rPr>
+                      <m:t>0</m:t>
+                    </m:r>
+                    <m:r>
+                      <a:rPr lang="pt-BR" sz="2400" i="1" dirty="0" smtClean="0">
+                        <a:latin typeface="Cambria Math" panose="02040503050406030204" pitchFamily="18" charset="0"/>
+                      </a:rPr>
+                      <m:t>,</m:t>
+                    </m:r>
+                    <m:r>
+                      <a:rPr lang="pt-BR" sz="2400" i="1" dirty="0" smtClean="0">
+                        <a:latin typeface="Cambria Math" panose="02040503050406030204" pitchFamily="18" charset="0"/>
+                      </a:rPr>
+                      <m:t>05</m:t>
+                    </m:r>
+                    <m:r>
+                      <a:rPr lang="pt-BR" sz="2400" i="1" dirty="0" smtClean="0">
+                        <a:latin typeface="Cambria Math" panose="02040503050406030204" pitchFamily="18" charset="0"/>
+                      </a:rPr>
+                      <m:t>/</m:t>
+                    </m:r>
+                    <m:r>
+                      <a:rPr lang="pt-BR" sz="2400" i="1" dirty="0" smtClean="0">
+                        <a:latin typeface="Cambria Math" panose="02040503050406030204" pitchFamily="18" charset="0"/>
+                      </a:rPr>
+                      <m:t>0</m:t>
+                    </m:r>
+                    <m:r>
+                      <a:rPr lang="pt-BR" sz="2400" i="1" dirty="0" smtClean="0">
+                        <a:latin typeface="Cambria Math" panose="02040503050406030204" pitchFamily="18" charset="0"/>
+                      </a:rPr>
+                      <m:t>,</m:t>
+                    </m:r>
+                    <m:r>
+                      <a:rPr lang="pt-BR" sz="2400" i="1" dirty="0" smtClean="0">
+                        <a:latin typeface="Cambria Math" panose="02040503050406030204" pitchFamily="18" charset="0"/>
+                      </a:rPr>
+                      <m:t>50</m:t>
+                    </m:r>
+                    <m:r>
+                      <a:rPr lang="pt-BR" sz="2400" i="1" dirty="0" smtClean="0">
+                        <a:latin typeface="Cambria Math" panose="02040503050406030204" pitchFamily="18" charset="0"/>
+                      </a:rPr>
+                      <m:t>=</m:t>
                     </m:r>
                     <m:r>
                       <a:rPr lang="pt-BR" sz="2400" b="0" i="1" dirty="0" smtClean="0">
                         <a:latin typeface="Cambria Math" panose="02040503050406030204" pitchFamily="18" charset="0"/>
                       </a:rPr>
-                      <m:t>0,10</m:t>
+                      <m:t>0</m:t>
+                    </m:r>
+                    <m:r>
+                      <a:rPr lang="pt-BR" sz="2400" b="0" i="1" dirty="0" smtClean="0">
+                        <a:latin typeface="Cambria Math" panose="02040503050406030204" pitchFamily="18" charset="0"/>
+                      </a:rPr>
+                      <m:t>,</m:t>
+                    </m:r>
+                    <m:r>
+                      <a:rPr lang="pt-BR" sz="2400" b="0" i="1" dirty="0" smtClean="0">
+                        <a:latin typeface="Cambria Math" panose="02040503050406030204" pitchFamily="18" charset="0"/>
+                      </a:rPr>
+                      <m:t>10</m:t>
                     </m:r>
                   </m:oMath>
                 </a14:m>
@@ -4674,7 +4742,25 @@
                       <a:rPr lang="pt-BR" sz="2400" b="0" i="1" smtClean="0">
                         <a:latin typeface="Cambria Math" panose="02040503050406030204" pitchFamily="18" charset="0"/>
                       </a:rPr>
-                      <m:t>=2/5</m:t>
+                      <m:t>=</m:t>
+                    </m:r>
+                    <m:r>
+                      <a:rPr lang="pt-BR" sz="2400" b="0" i="1" smtClean="0">
+                        <a:latin typeface="Cambria Math" panose="02040503050406030204" pitchFamily="18" charset="0"/>
+                      </a:rPr>
+                      <m:t>2</m:t>
+                    </m:r>
+                    <m:r>
+                      <a:rPr lang="pt-BR" sz="2400" b="0" i="1" smtClean="0">
+                        <a:latin typeface="Cambria Math" panose="02040503050406030204" pitchFamily="18" charset="0"/>
+                      </a:rPr>
+                      <m:t>/</m:t>
+                    </m:r>
+                    <m:r>
+                      <a:rPr lang="pt-BR" sz="2400" b="0" i="1" smtClean="0">
+                        <a:latin typeface="Cambria Math" panose="02040503050406030204" pitchFamily="18" charset="0"/>
+                      </a:rPr>
+                      <m:t>5</m:t>
                     </m:r>
                   </m:oMath>
                 </a14:m>
@@ -4730,7 +4816,25 @@
                       <a:rPr lang="pt-BR" sz="2400" b="0" i="1" smtClean="0">
                         <a:latin typeface="Cambria Math" panose="02040503050406030204" pitchFamily="18" charset="0"/>
                       </a:rPr>
-                      <m:t>=2/5</m:t>
+                      <m:t>=</m:t>
+                    </m:r>
+                    <m:r>
+                      <a:rPr lang="pt-BR" sz="2400" b="0" i="1" smtClean="0">
+                        <a:latin typeface="Cambria Math" panose="02040503050406030204" pitchFamily="18" charset="0"/>
+                      </a:rPr>
+                      <m:t>2</m:t>
+                    </m:r>
+                    <m:r>
+                      <a:rPr lang="pt-BR" sz="2400" b="0" i="1" smtClean="0">
+                        <a:latin typeface="Cambria Math" panose="02040503050406030204" pitchFamily="18" charset="0"/>
+                      </a:rPr>
+                      <m:t>/</m:t>
+                    </m:r>
+                    <m:r>
+                      <a:rPr lang="pt-BR" sz="2400" b="0" i="1" smtClean="0">
+                        <a:latin typeface="Cambria Math" panose="02040503050406030204" pitchFamily="18" charset="0"/>
+                      </a:rPr>
+                      <m:t>5</m:t>
                     </m:r>
                   </m:oMath>
                 </a14:m>
@@ -4786,7 +4890,25 @@
                       <a:rPr lang="pt-BR" sz="2400" b="0" i="1" smtClean="0">
                         <a:latin typeface="Cambria Math" panose="02040503050406030204" pitchFamily="18" charset="0"/>
                       </a:rPr>
-                      <m:t>=1/5</m:t>
+                      <m:t>=</m:t>
+                    </m:r>
+                    <m:r>
+                      <a:rPr lang="pt-BR" sz="2400" b="0" i="1" smtClean="0">
+                        <a:latin typeface="Cambria Math" panose="02040503050406030204" pitchFamily="18" charset="0"/>
+                      </a:rPr>
+                      <m:t>1</m:t>
+                    </m:r>
+                    <m:r>
+                      <a:rPr lang="pt-BR" sz="2400" b="0" i="1" smtClean="0">
+                        <a:latin typeface="Cambria Math" panose="02040503050406030204" pitchFamily="18" charset="0"/>
+                      </a:rPr>
+                      <m:t>/</m:t>
+                    </m:r>
+                    <m:r>
+                      <a:rPr lang="pt-BR" sz="2400" b="0" i="1" smtClean="0">
+                        <a:latin typeface="Cambria Math" panose="02040503050406030204" pitchFamily="18" charset="0"/>
+                      </a:rPr>
+                      <m:t>5</m:t>
                     </m:r>
                   </m:oMath>
                 </a14:m>
@@ -4859,7 +4981,25 @@
                       <a:rPr lang="pt-BR" sz="2400" b="0" i="1" smtClean="0">
                         <a:latin typeface="Cambria Math" panose="02040503050406030204" pitchFamily="18" charset="0"/>
                       </a:rPr>
-                      <m:t>=3/6</m:t>
+                      <m:t>=</m:t>
+                    </m:r>
+                    <m:r>
+                      <a:rPr lang="pt-BR" sz="2400" b="0" i="1" smtClean="0">
+                        <a:latin typeface="Cambria Math" panose="02040503050406030204" pitchFamily="18" charset="0"/>
+                      </a:rPr>
+                      <m:t>3</m:t>
+                    </m:r>
+                    <m:r>
+                      <a:rPr lang="pt-BR" sz="2400" b="0" i="1" smtClean="0">
+                        <a:latin typeface="Cambria Math" panose="02040503050406030204" pitchFamily="18" charset="0"/>
+                      </a:rPr>
+                      <m:t>/</m:t>
+                    </m:r>
+                    <m:r>
+                      <a:rPr lang="pt-BR" sz="2400" b="0" i="1" smtClean="0">
+                        <a:latin typeface="Cambria Math" panose="02040503050406030204" pitchFamily="18" charset="0"/>
+                      </a:rPr>
+                      <m:t>6</m:t>
                     </m:r>
                     <m:r>
                       <a:rPr lang="pt-BR" sz="2400" i="1">
@@ -4933,7 +5073,13 @@
                       <a:rPr lang="pt-BR" sz="2400" i="1">
                         <a:latin typeface="Cambria Math" panose="02040503050406030204" pitchFamily="18" charset="0"/>
                       </a:rPr>
-                      <m:t>/6</m:t>
+                      <m:t>/</m:t>
+                    </m:r>
+                    <m:r>
+                      <a:rPr lang="pt-BR" sz="2400" i="1">
+                        <a:latin typeface="Cambria Math" panose="02040503050406030204" pitchFamily="18" charset="0"/>
+                      </a:rPr>
+                      <m:t>6</m:t>
                     </m:r>
                   </m:oMath>
                 </a14:m>
@@ -5322,7 +5468,19 @@
                           <a:rPr lang="pt-BR" sz="2400" b="0" i="1" smtClean="0">
                             <a:latin typeface="Cambria Math" panose="02040503050406030204" pitchFamily="18" charset="0"/>
                           </a:rPr>
-                          <m:t>1/5</m:t>
+                          <m:t>1</m:t>
+                        </m:r>
+                        <m:r>
+                          <a:rPr lang="pt-BR" sz="2400" b="0" i="1" smtClean="0">
+                            <a:latin typeface="Cambria Math" panose="02040503050406030204" pitchFamily="18" charset="0"/>
+                          </a:rPr>
+                          <m:t>/</m:t>
+                        </m:r>
+                        <m:r>
+                          <a:rPr lang="pt-BR" sz="2400" b="0" i="1" smtClean="0">
+                            <a:latin typeface="Cambria Math" panose="02040503050406030204" pitchFamily="18" charset="0"/>
+                          </a:rPr>
+                          <m:t>5</m:t>
                         </m:r>
                       </m:num>
                       <m:den>
@@ -5414,12 +5572,18 @@
                       <a:rPr lang="pt-BR" sz="2400" i="1" dirty="0" smtClean="0">
                         <a:latin typeface="Cambria Math" panose="02040503050406030204" pitchFamily="18" charset="0"/>
                       </a:rPr>
-                      <m:t>₁)·</m:t>
+                      <m:t>₁</m:t>
                     </m:r>
                     <m:r>
                       <a:rPr lang="pt-BR" sz="2400" i="1" dirty="0" smtClean="0">
                         <a:latin typeface="Cambria Math" panose="02040503050406030204" pitchFamily="18" charset="0"/>
                       </a:rPr>
+                      <m:t>)·</m:t>
+                    </m:r>
+                    <m:r>
+                      <a:rPr lang="pt-BR" sz="2400" i="1" dirty="0" smtClean="0">
+                        <a:latin typeface="Cambria Math" panose="02040503050406030204" pitchFamily="18" charset="0"/>
+                      </a:rPr>
                       <m:t>𝑃</m:t>
                     </m:r>
                     <m:r>
@@ -5450,12 +5614,18 @@
                       <a:rPr lang="pt-BR" sz="2400" i="1" dirty="0" smtClean="0">
                         <a:latin typeface="Cambria Math" panose="02040503050406030204" pitchFamily="18" charset="0"/>
                       </a:rPr>
-                      <m:t>₁)+</m:t>
+                      <m:t>₁</m:t>
                     </m:r>
                     <m:r>
                       <a:rPr lang="pt-BR" sz="2400" i="1" dirty="0" smtClean="0">
                         <a:latin typeface="Cambria Math" panose="02040503050406030204" pitchFamily="18" charset="0"/>
                       </a:rPr>
+                      <m:t>)+</m:t>
+                    </m:r>
+                    <m:r>
+                      <a:rPr lang="pt-BR" sz="2400" i="1" dirty="0" smtClean="0">
+                        <a:latin typeface="Cambria Math" panose="02040503050406030204" pitchFamily="18" charset="0"/>
+                      </a:rPr>
                       <m:t>𝑃</m:t>
                     </m:r>
                     <m:r>
@@ -5474,12 +5644,18 @@
                       <a:rPr lang="pt-BR" sz="2400" i="1" dirty="0" smtClean="0">
                         <a:latin typeface="Cambria Math" panose="02040503050406030204" pitchFamily="18" charset="0"/>
                       </a:rPr>
-                      <m:t>₂)·</m:t>
+                      <m:t>₂</m:t>
                     </m:r>
                     <m:r>
                       <a:rPr lang="pt-BR" sz="2400" i="1" dirty="0" smtClean="0">
                         <a:latin typeface="Cambria Math" panose="02040503050406030204" pitchFamily="18" charset="0"/>
                       </a:rPr>
+                      <m:t>)·</m:t>
+                    </m:r>
+                    <m:r>
+                      <a:rPr lang="pt-BR" sz="2400" i="1" dirty="0" smtClean="0">
+                        <a:latin typeface="Cambria Math" panose="02040503050406030204" pitchFamily="18" charset="0"/>
+                      </a:rPr>
                       <m:t>𝑃</m:t>
                     </m:r>
                     <m:r>
@@ -5510,12 +5686,18 @@
                       <a:rPr lang="pt-BR" sz="2400" i="1" dirty="0" smtClean="0">
                         <a:latin typeface="Cambria Math" panose="02040503050406030204" pitchFamily="18" charset="0"/>
                       </a:rPr>
-                      <m:t>₂)+</m:t>
+                      <m:t>₂</m:t>
                     </m:r>
                     <m:r>
                       <a:rPr lang="pt-BR" sz="2400" i="1" dirty="0" smtClean="0">
                         <a:latin typeface="Cambria Math" panose="02040503050406030204" pitchFamily="18" charset="0"/>
                       </a:rPr>
+                      <m:t>)+</m:t>
+                    </m:r>
+                    <m:r>
+                      <a:rPr lang="pt-BR" sz="2400" i="1" dirty="0" smtClean="0">
+                        <a:latin typeface="Cambria Math" panose="02040503050406030204" pitchFamily="18" charset="0"/>
+                      </a:rPr>
                       <m:t>𝑃</m:t>
                     </m:r>
                     <m:r>
@@ -5534,12 +5716,18 @@
                       <a:rPr lang="pt-BR" sz="2400" i="1" dirty="0" smtClean="0">
                         <a:latin typeface="Cambria Math" panose="02040503050406030204" pitchFamily="18" charset="0"/>
                       </a:rPr>
-                      <m:t>₃)·</m:t>
+                      <m:t>₃</m:t>
                     </m:r>
                     <m:r>
                       <a:rPr lang="pt-BR" sz="2400" i="1" dirty="0" smtClean="0">
                         <a:latin typeface="Cambria Math" panose="02040503050406030204" pitchFamily="18" charset="0"/>
                       </a:rPr>
+                      <m:t>)·</m:t>
+                    </m:r>
+                    <m:r>
+                      <a:rPr lang="pt-BR" sz="2400" i="1" dirty="0" smtClean="0">
+                        <a:latin typeface="Cambria Math" panose="02040503050406030204" pitchFamily="18" charset="0"/>
+                      </a:rPr>
                       <m:t>𝑃</m:t>
                     </m:r>
                     <m:r>
@@ -5570,7 +5758,13 @@
                       <a:rPr lang="pt-BR" sz="2400" i="1" dirty="0" smtClean="0">
                         <a:latin typeface="Cambria Math" panose="02040503050406030204" pitchFamily="18" charset="0"/>
                       </a:rPr>
-                      <m:t>₃)</m:t>
+                      <m:t>₃</m:t>
+                    </m:r>
+                    <m:r>
+                      <a:rPr lang="pt-BR" sz="2400" i="1" dirty="0" smtClean="0">
+                        <a:latin typeface="Cambria Math" panose="02040503050406030204" pitchFamily="18" charset="0"/>
+                      </a:rPr>
+                      <m:t>)</m:t>
                     </m:r>
                   </m:oMath>
                 </a14:m>
@@ -5592,13 +5786,169 @@
                         <a:rPr lang="pt-BR" sz="2400" i="1" dirty="0" smtClean="0">
                           <a:latin typeface="Cambria Math" panose="02040503050406030204" pitchFamily="18" charset="0"/>
                         </a:rPr>
-                        <m:t>= 2/10 + 2/15 + 1/5 = 3/15 + 2/15 + 3/15 = </m:t>
+                        <m:t>= </m:t>
+                      </m:r>
+                      <m:r>
+                        <a:rPr lang="pt-BR" sz="2400" i="1" dirty="0" smtClean="0">
+                          <a:latin typeface="Cambria Math" panose="02040503050406030204" pitchFamily="18" charset="0"/>
+                        </a:rPr>
+                        <m:t>2</m:t>
+                      </m:r>
+                      <m:r>
+                        <a:rPr lang="pt-BR" sz="2400" i="1" dirty="0" smtClean="0">
+                          <a:latin typeface="Cambria Math" panose="02040503050406030204" pitchFamily="18" charset="0"/>
+                        </a:rPr>
+                        <m:t>/</m:t>
+                      </m:r>
+                      <m:r>
+                        <a:rPr lang="pt-BR" sz="2400" i="1" dirty="0" smtClean="0">
+                          <a:latin typeface="Cambria Math" panose="02040503050406030204" pitchFamily="18" charset="0"/>
+                        </a:rPr>
+                        <m:t>10</m:t>
+                      </m:r>
+                      <m:r>
+                        <a:rPr lang="pt-BR" sz="2400" i="1" dirty="0" smtClean="0">
+                          <a:latin typeface="Cambria Math" panose="02040503050406030204" pitchFamily="18" charset="0"/>
+                        </a:rPr>
+                        <m:t> + </m:t>
+                      </m:r>
+                      <m:r>
+                        <a:rPr lang="pt-BR" sz="2400" i="1" dirty="0" smtClean="0">
+                          <a:latin typeface="Cambria Math" panose="02040503050406030204" pitchFamily="18" charset="0"/>
+                        </a:rPr>
+                        <m:t>2</m:t>
+                      </m:r>
+                      <m:r>
+                        <a:rPr lang="pt-BR" sz="2400" i="1" dirty="0" smtClean="0">
+                          <a:latin typeface="Cambria Math" panose="02040503050406030204" pitchFamily="18" charset="0"/>
+                        </a:rPr>
+                        <m:t>/</m:t>
+                      </m:r>
+                      <m:r>
+                        <a:rPr lang="pt-BR" sz="2400" i="1" dirty="0" smtClean="0">
+                          <a:latin typeface="Cambria Math" panose="02040503050406030204" pitchFamily="18" charset="0"/>
+                        </a:rPr>
+                        <m:t>15</m:t>
+                      </m:r>
+                      <m:r>
+                        <a:rPr lang="pt-BR" sz="2400" i="1" dirty="0" smtClean="0">
+                          <a:latin typeface="Cambria Math" panose="02040503050406030204" pitchFamily="18" charset="0"/>
+                        </a:rPr>
+                        <m:t> + </m:t>
+                      </m:r>
+                      <m:r>
+                        <a:rPr lang="pt-BR" sz="2400" i="1" dirty="0" smtClean="0">
+                          <a:latin typeface="Cambria Math" panose="02040503050406030204" pitchFamily="18" charset="0"/>
+                        </a:rPr>
+                        <m:t>1</m:t>
+                      </m:r>
+                      <m:r>
+                        <a:rPr lang="pt-BR" sz="2400" i="1" dirty="0" smtClean="0">
+                          <a:latin typeface="Cambria Math" panose="02040503050406030204" pitchFamily="18" charset="0"/>
+                        </a:rPr>
+                        <m:t>/</m:t>
+                      </m:r>
+                      <m:r>
+                        <a:rPr lang="pt-BR" sz="2400" i="1" dirty="0" smtClean="0">
+                          <a:latin typeface="Cambria Math" panose="02040503050406030204" pitchFamily="18" charset="0"/>
+                        </a:rPr>
+                        <m:t>5</m:t>
+                      </m:r>
+                      <m:r>
+                        <a:rPr lang="pt-BR" sz="2400" i="1" dirty="0" smtClean="0">
+                          <a:latin typeface="Cambria Math" panose="02040503050406030204" pitchFamily="18" charset="0"/>
+                        </a:rPr>
+                        <m:t> = </m:t>
+                      </m:r>
+                      <m:r>
+                        <a:rPr lang="pt-BR" sz="2400" i="1" dirty="0" smtClean="0">
+                          <a:latin typeface="Cambria Math" panose="02040503050406030204" pitchFamily="18" charset="0"/>
+                        </a:rPr>
+                        <m:t>3</m:t>
+                      </m:r>
+                      <m:r>
+                        <a:rPr lang="pt-BR" sz="2400" i="1" dirty="0" smtClean="0">
+                          <a:latin typeface="Cambria Math" panose="02040503050406030204" pitchFamily="18" charset="0"/>
+                        </a:rPr>
+                        <m:t>/</m:t>
+                      </m:r>
+                      <m:r>
+                        <a:rPr lang="pt-BR" sz="2400" i="1" dirty="0" smtClean="0">
+                          <a:latin typeface="Cambria Math" panose="02040503050406030204" pitchFamily="18" charset="0"/>
+                        </a:rPr>
+                        <m:t>15</m:t>
+                      </m:r>
+                      <m:r>
+                        <a:rPr lang="pt-BR" sz="2400" i="1" dirty="0" smtClean="0">
+                          <a:latin typeface="Cambria Math" panose="02040503050406030204" pitchFamily="18" charset="0"/>
+                        </a:rPr>
+                        <m:t> + </m:t>
+                      </m:r>
+                      <m:r>
+                        <a:rPr lang="pt-BR" sz="2400" i="1" dirty="0" smtClean="0">
+                          <a:latin typeface="Cambria Math" panose="02040503050406030204" pitchFamily="18" charset="0"/>
+                        </a:rPr>
+                        <m:t>2</m:t>
+                      </m:r>
+                      <m:r>
+                        <a:rPr lang="pt-BR" sz="2400" i="1" dirty="0" smtClean="0">
+                          <a:latin typeface="Cambria Math" panose="02040503050406030204" pitchFamily="18" charset="0"/>
+                        </a:rPr>
+                        <m:t>/</m:t>
+                      </m:r>
+                      <m:r>
+                        <a:rPr lang="pt-BR" sz="2400" i="1" dirty="0" smtClean="0">
+                          <a:latin typeface="Cambria Math" panose="02040503050406030204" pitchFamily="18" charset="0"/>
+                        </a:rPr>
+                        <m:t>15</m:t>
+                      </m:r>
+                      <m:r>
+                        <a:rPr lang="pt-BR" sz="2400" i="1" dirty="0" smtClean="0">
+                          <a:latin typeface="Cambria Math" panose="02040503050406030204" pitchFamily="18" charset="0"/>
+                        </a:rPr>
+                        <m:t> + </m:t>
+                      </m:r>
+                      <m:r>
+                        <a:rPr lang="pt-BR" sz="2400" i="1" dirty="0" smtClean="0">
+                          <a:latin typeface="Cambria Math" panose="02040503050406030204" pitchFamily="18" charset="0"/>
+                        </a:rPr>
+                        <m:t>3</m:t>
+                      </m:r>
+                      <m:r>
+                        <a:rPr lang="pt-BR" sz="2400" i="1" dirty="0" smtClean="0">
+                          <a:latin typeface="Cambria Math" panose="02040503050406030204" pitchFamily="18" charset="0"/>
+                        </a:rPr>
+                        <m:t>/</m:t>
+                      </m:r>
+                      <m:r>
+                        <a:rPr lang="pt-BR" sz="2400" i="1" dirty="0" smtClean="0">
+                          <a:latin typeface="Cambria Math" panose="02040503050406030204" pitchFamily="18" charset="0"/>
+                        </a:rPr>
+                        <m:t>15</m:t>
+                      </m:r>
+                      <m:r>
+                        <a:rPr lang="pt-BR" sz="2400" i="1" dirty="0" smtClean="0">
+                          <a:latin typeface="Cambria Math" panose="02040503050406030204" pitchFamily="18" charset="0"/>
+                        </a:rPr>
+                        <m:t> = </m:t>
                       </m:r>
                       <m:r>
                         <a:rPr lang="pt-BR" sz="2400" b="0" i="1" dirty="0" smtClean="0">
                           <a:latin typeface="Cambria Math" panose="02040503050406030204" pitchFamily="18" charset="0"/>
                         </a:rPr>
-                        <m:t>8/15</m:t>
+                        <m:t>8</m:t>
+                      </m:r>
+                      <m:r>
+                        <a:rPr lang="pt-BR" sz="2400" b="0" i="1" dirty="0" smtClean="0">
+                          <a:latin typeface="Cambria Math" panose="02040503050406030204" pitchFamily="18" charset="0"/>
+                        </a:rPr>
+                        <m:t>/</m:t>
+                      </m:r>
+                      <m:r>
+                        <a:rPr lang="pt-BR" sz="2400" b="0" i="1" dirty="0" smtClean="0">
+                          <a:latin typeface="Cambria Math" panose="02040503050406030204" pitchFamily="18" charset="0"/>
+                        </a:rPr>
+                        <m:t>15</m:t>
                       </m:r>
                     </m:oMath>
                   </m:oMathPara>
@@ -5684,7 +6034,19 @@
                           <a:rPr lang="pt-BR" sz="2400" b="0" i="1" smtClean="0">
                             <a:latin typeface="Cambria Math" panose="02040503050406030204" pitchFamily="18" charset="0"/>
                           </a:rPr>
-                          <m:t>1/5</m:t>
+                          <m:t>1</m:t>
+                        </m:r>
+                        <m:r>
+                          <a:rPr lang="pt-BR" sz="2400" b="0" i="1" smtClean="0">
+                            <a:latin typeface="Cambria Math" panose="02040503050406030204" pitchFamily="18" charset="0"/>
+                          </a:rPr>
+                          <m:t>/</m:t>
+                        </m:r>
+                        <m:r>
+                          <a:rPr lang="pt-BR" sz="2400" b="0" i="1" smtClean="0">
+                            <a:latin typeface="Cambria Math" panose="02040503050406030204" pitchFamily="18" charset="0"/>
+                          </a:rPr>
+                          <m:t>5</m:t>
                         </m:r>
                       </m:num>
                       <m:den>
@@ -5733,7 +6095,19 @@
                           <a:rPr lang="pt-BR" sz="2400" b="0" i="1" smtClean="0">
                             <a:latin typeface="Cambria Math" panose="02040503050406030204" pitchFamily="18" charset="0"/>
                           </a:rPr>
-                          <m:t>1/5</m:t>
+                          <m:t>1</m:t>
+                        </m:r>
+                        <m:r>
+                          <a:rPr lang="pt-BR" sz="2400" b="0" i="1" smtClean="0">
+                            <a:latin typeface="Cambria Math" panose="02040503050406030204" pitchFamily="18" charset="0"/>
+                          </a:rPr>
+                          <m:t>/</m:t>
+                        </m:r>
+                        <m:r>
+                          <a:rPr lang="pt-BR" sz="2400" b="0" i="1" smtClean="0">
+                            <a:latin typeface="Cambria Math" panose="02040503050406030204" pitchFamily="18" charset="0"/>
+                          </a:rPr>
+                          <m:t>5</m:t>
                         </m:r>
                       </m:num>
                       <m:den>
@@ -5741,7 +6115,19 @@
                           <a:rPr lang="pt-BR" sz="2400" b="0" i="1" smtClean="0">
                             <a:latin typeface="Cambria Math" panose="02040503050406030204" pitchFamily="18" charset="0"/>
                           </a:rPr>
-                          <m:t>8/15</m:t>
+                          <m:t>8</m:t>
+                        </m:r>
+                        <m:r>
+                          <a:rPr lang="pt-BR" sz="2400" b="0" i="1" smtClean="0">
+                            <a:latin typeface="Cambria Math" panose="02040503050406030204" pitchFamily="18" charset="0"/>
+                          </a:rPr>
+                          <m:t>/</m:t>
+                        </m:r>
+                        <m:r>
+                          <a:rPr lang="pt-BR" sz="2400" b="0" i="1" smtClean="0">
+                            <a:latin typeface="Cambria Math" panose="02040503050406030204" pitchFamily="18" charset="0"/>
+                          </a:rPr>
+                          <m:t>15</m:t>
                         </m:r>
                       </m:den>
                     </m:f>
@@ -5749,7 +6135,25 @@
                       <a:rPr lang="pt-BR" sz="2400" b="0" i="1" dirty="0" smtClean="0">
                         <a:latin typeface="Cambria Math" panose="02040503050406030204" pitchFamily="18" charset="0"/>
                       </a:rPr>
-                      <m:t>=3/8</m:t>
+                      <m:t>=</m:t>
+                    </m:r>
+                    <m:r>
+                      <a:rPr lang="pt-BR" sz="2400" b="0" i="1" dirty="0" smtClean="0">
+                        <a:latin typeface="Cambria Math" panose="02040503050406030204" pitchFamily="18" charset="0"/>
+                      </a:rPr>
+                      <m:t>3</m:t>
+                    </m:r>
+                    <m:r>
+                      <a:rPr lang="pt-BR" sz="2400" b="0" i="1" dirty="0" smtClean="0">
+                        <a:latin typeface="Cambria Math" panose="02040503050406030204" pitchFamily="18" charset="0"/>
+                      </a:rPr>
+                      <m:t>/</m:t>
+                    </m:r>
+                    <m:r>
+                      <a:rPr lang="pt-BR" sz="2400" b="0" i="1" dirty="0" smtClean="0">
+                        <a:latin typeface="Cambria Math" panose="02040503050406030204" pitchFamily="18" charset="0"/>
+                      </a:rPr>
+                      <m:t>8</m:t>
                     </m:r>
                   </m:oMath>
                 </a14:m>
@@ -5898,8 +6302,8 @@
           <a:chExt cx="0" cy="0"/>
         </a:xfrm>
       </p:grpSpPr>
-      <mc:AlternateContent xmlns:mc="http://schemas.openxmlformats.org/markup-compatibility/2006">
-        <mc:Choice xmlns:a14="http://schemas.microsoft.com/office/drawing/2010/main" Requires="a14">
+      <mc:AlternateContent xmlns:mc="http://schemas.openxmlformats.org/markup-compatibility/2006" xmlns:a14="http://schemas.microsoft.com/office/drawing/2010/main">
+        <mc:Choice Requires="a14">
           <p:sp>
             <p:nvSpPr>
               <p:cNvPr id="6" name="CaixaDeTexto 5">
@@ -6193,7 +6597,19 @@
                       <a:rPr lang="pt-BR" sz="2400" b="0" i="1" smtClean="0">
                         <a:latin typeface="Cambria Math" panose="02040503050406030204" pitchFamily="18" charset="0"/>
                       </a:rPr>
-                      <m:t>, 1≤</m:t>
+                      <m:t>, </m:t>
+                    </m:r>
+                    <m:r>
+                      <a:rPr lang="pt-BR" sz="2400" b="0" i="1" smtClean="0">
+                        <a:latin typeface="Cambria Math" panose="02040503050406030204" pitchFamily="18" charset="0"/>
+                      </a:rPr>
+                      <m:t>1</m:t>
+                    </m:r>
+                    <m:r>
+                      <a:rPr lang="pt-BR" sz="2400" b="0" i="1" smtClean="0">
+                        <a:latin typeface="Cambria Math" panose="02040503050406030204" pitchFamily="18" charset="0"/>
+                      </a:rPr>
+                      <m:t>≤</m:t>
                     </m:r>
                     <m:r>
                       <a:rPr lang="pt-BR" sz="2400" b="0" i="1" smtClean="0">
@@ -6500,7 +6916,13 @@
                                 <a:rPr lang="pt-BR" sz="2400" b="0" i="1" smtClean="0">
                                   <a:latin typeface="Cambria Math" panose="02040503050406030204" pitchFamily="18" charset="0"/>
                                 </a:rPr>
-                                <m:t>=1</m:t>
+                                <m:t>=</m:t>
+                              </m:r>
+                              <m:r>
+                                <a:rPr lang="pt-BR" sz="2400" b="0" i="1" smtClean="0">
+                                  <a:latin typeface="Cambria Math" panose="02040503050406030204" pitchFamily="18" charset="0"/>
+                                </a:rPr>
+                                <m:t>1</m:t>
                               </m:r>
                             </m:sub>
                             <m:sup>
@@ -6627,7 +7049,7 @@
             </p:txBody>
           </p:sp>
         </mc:Choice>
-        <mc:Fallback>
+        <mc:Fallback xmlns="">
           <p:sp>
             <p:nvSpPr>
               <p:cNvPr id="6" name="CaixaDeTexto 5">
@@ -7985,7 +8407,13 @@
                       <a:rPr lang="pt-BR" sz="2400" b="0" i="1" smtClean="0">
                         <a:latin typeface="Cambria Math" panose="02040503050406030204" pitchFamily="18" charset="0"/>
                       </a:rPr>
-                      <m:t>=∅</m:t>
+                      <m:t>=</m:t>
+                    </m:r>
+                    <m:r>
+                      <a:rPr lang="pt-BR" sz="2400" b="0" i="1" smtClean="0">
+                        <a:latin typeface="Cambria Math" panose="02040503050406030204" pitchFamily="18" charset="0"/>
+                      </a:rPr>
+                      <m:t>∅</m:t>
                     </m:r>
                   </m:oMath>
                 </a14:m>
@@ -8431,13 +8859,19 @@
                       <a:rPr lang="pt-BR" sz="2400" i="1" dirty="0" smtClean="0">
                         <a:latin typeface="Cambria Math" panose="02040503050406030204" pitchFamily="18" charset="0"/>
                       </a:rPr>
-                      <m:t>ⱼ</m:t>
+                      <m:t>ⱼ=</m:t>
                     </m:r>
                     <m:r>
                       <a:rPr lang="pt-BR" sz="2400" i="1" dirty="0" smtClean="0">
                         <a:latin typeface="Cambria Math" panose="02040503050406030204" pitchFamily="18" charset="0"/>
                       </a:rPr>
-                      <m:t>=∅)</m:t>
+                      <m:t>∅</m:t>
+                    </m:r>
+                    <m:r>
+                      <a:rPr lang="pt-BR" sz="2400" i="1" dirty="0" smtClean="0">
+                        <a:latin typeface="Cambria Math" panose="02040503050406030204" pitchFamily="18" charset="0"/>
+                      </a:rPr>
+                      <m:t>)</m:t>
                     </m:r>
                   </m:oMath>
                 </a14:m>
@@ -8463,55 +8897,85 @@
                       <a:rPr lang="pt-BR" sz="2400" i="1" dirty="0" smtClean="0">
                         <a:latin typeface="Cambria Math" panose="02040503050406030204" pitchFamily="18" charset="0"/>
                       </a:rPr>
-                      <m:t>₁∪</m:t>
+                      <m:t>₁</m:t>
                     </m:r>
                     <m:r>
                       <a:rPr lang="pt-BR" sz="2400" i="1" dirty="0" smtClean="0">
                         <a:latin typeface="Cambria Math" panose="02040503050406030204" pitchFamily="18" charset="0"/>
                       </a:rPr>
+                      <m:t>∪</m:t>
+                    </m:r>
+                    <m:r>
+                      <a:rPr lang="pt-BR" sz="2400" i="1" dirty="0" smtClean="0">
+                        <a:latin typeface="Cambria Math" panose="02040503050406030204" pitchFamily="18" charset="0"/>
+                      </a:rPr>
                       <m:t>𝐶</m:t>
                     </m:r>
                     <m:r>
                       <a:rPr lang="pt-BR" sz="2400" i="1" dirty="0" smtClean="0">
                         <a:latin typeface="Cambria Math" panose="02040503050406030204" pitchFamily="18" charset="0"/>
                       </a:rPr>
-                      <m:t>₂∪</m:t>
+                      <m:t>₂</m:t>
                     </m:r>
                     <m:r>
                       <a:rPr lang="pt-BR" sz="2400" i="1" dirty="0" smtClean="0">
                         <a:latin typeface="Cambria Math" panose="02040503050406030204" pitchFamily="18" charset="0"/>
                       </a:rPr>
+                      <m:t>∪</m:t>
+                    </m:r>
+                    <m:r>
+                      <a:rPr lang="pt-BR" sz="2400" i="1" dirty="0" smtClean="0">
+                        <a:latin typeface="Cambria Math" panose="02040503050406030204" pitchFamily="18" charset="0"/>
+                      </a:rPr>
                       <m:t>𝐶</m:t>
                     </m:r>
                     <m:r>
                       <a:rPr lang="pt-BR" sz="2400" i="1" dirty="0" smtClean="0">
                         <a:latin typeface="Cambria Math" panose="02040503050406030204" pitchFamily="18" charset="0"/>
                       </a:rPr>
-                      <m:t>₃∪</m:t>
+                      <m:t>₃</m:t>
                     </m:r>
                     <m:r>
                       <a:rPr lang="pt-BR" sz="2400" i="1" dirty="0" smtClean="0">
                         <a:latin typeface="Cambria Math" panose="02040503050406030204" pitchFamily="18" charset="0"/>
                       </a:rPr>
+                      <m:t>∪</m:t>
+                    </m:r>
+                    <m:r>
+                      <a:rPr lang="pt-BR" sz="2400" i="1" dirty="0" smtClean="0">
+                        <a:latin typeface="Cambria Math" panose="02040503050406030204" pitchFamily="18" charset="0"/>
+                      </a:rPr>
                       <m:t>𝐶</m:t>
                     </m:r>
                     <m:r>
                       <a:rPr lang="pt-BR" sz="2400" i="1" dirty="0" smtClean="0">
                         <a:latin typeface="Cambria Math" panose="02040503050406030204" pitchFamily="18" charset="0"/>
                       </a:rPr>
-                      <m:t>₄∪</m:t>
+                      <m:t>₄</m:t>
                     </m:r>
                     <m:r>
                       <a:rPr lang="pt-BR" sz="2400" i="1" dirty="0" smtClean="0">
                         <a:latin typeface="Cambria Math" panose="02040503050406030204" pitchFamily="18" charset="0"/>
                       </a:rPr>
+                      <m:t>∪</m:t>
+                    </m:r>
+                    <m:r>
+                      <a:rPr lang="pt-BR" sz="2400" i="1" dirty="0" smtClean="0">
+                        <a:latin typeface="Cambria Math" panose="02040503050406030204" pitchFamily="18" charset="0"/>
+                      </a:rPr>
                       <m:t>𝐶</m:t>
                     </m:r>
                     <m:r>
                       <a:rPr lang="pt-BR" sz="2400" i="1" dirty="0" smtClean="0">
                         <a:latin typeface="Cambria Math" panose="02040503050406030204" pitchFamily="18" charset="0"/>
                       </a:rPr>
-                      <m:t>₅=</m:t>
+                      <m:t>₅</m:t>
+                    </m:r>
+                    <m:r>
+                      <a:rPr lang="pt-BR" sz="2400" i="1" dirty="0" smtClean="0">
+                        <a:latin typeface="Cambria Math" panose="02040503050406030204" pitchFamily="18" charset="0"/>
+                      </a:rPr>
+                      <m:t>=</m:t>
                     </m:r>
                     <m:r>
                       <m:rPr>
